--- a/docs/나침반_NACHIMBAN_제출자료.pptx
+++ b/docs/나침반_NACHIMBAN_제출자료.pptx
@@ -21,7 +21,7 @@
     <p:sldId id="269" r:id="rId20"/>
     <p:sldId id="270" r:id="rId21"/>
   </p:sldIdLst>
-  <p:sldSz cx="10692000" cy="7560000" type="screen4x3"/>
+  <p:sldSz cx="12192119" cy="6858000" type="screen4x3"/>
   <p:notesSz cx="6858000" cy="9144000"/>
   <p:defaultTextStyle>
     <a:defPPr>
@@ -3098,7 +3098,7 @@
     <p:bg>
       <p:bgPr>
         <a:solidFill>
-          <a:srgbClr val="EFF6FF"/>
+          <a:srgbClr val="0F172A"/>
         </a:solidFill>
         <a:effectLst/>
       </p:bgPr>
@@ -3112,14 +3112,57 @@
       <p:grpSpPr/>
       <p:sp>
         <p:nvSpPr>
-          <p:cNvPr id="2" name="TextBox 1"/>
+          <p:cNvPr id="2" name="Oval 1"/>
+          <p:cNvSpPr/>
+          <p:nvPr/>
+        </p:nvSpPr>
+        <p:spPr>
+          <a:xfrm>
+            <a:off x="-1800000" y="-1080000"/>
+            <a:ext cx="6480000" cy="6480000"/>
+          </a:xfrm>
+          <a:prstGeom prst="ellipse">
+            <a:avLst/>
+          </a:prstGeom>
+          <a:solidFill>
+            <a:srgbClr val="1D4ED8"/>
+          </a:solidFill>
+          <a:ln>
+            <a:noFill/>
+          </a:ln>
+        </p:spPr>
+        <p:style>
+          <a:lnRef idx="1">
+            <a:schemeClr val="accent1"/>
+          </a:lnRef>
+          <a:fillRef idx="3">
+            <a:schemeClr val="accent1"/>
+          </a:fillRef>
+          <a:effectRef idx="2">
+            <a:schemeClr val="accent1"/>
+          </a:effectRef>
+          <a:fontRef idx="minor">
+            <a:schemeClr val="lt1"/>
+          </a:fontRef>
+        </p:style>
+        <p:txBody>
+          <a:bodyPr rtlCol="0" anchor="ctr"/>
+          <a:lstStyle/>
+          <a:p>
+            <a:pPr algn="ctr"/>
+          </a:p>
+        </p:txBody>
+      </p:sp>
+      <p:sp>
+        <p:nvSpPr>
+          <p:cNvPr id="3" name="TextBox 2"/>
           <p:cNvSpPr txBox="1"/>
           <p:nvPr/>
         </p:nvSpPr>
         <p:spPr>
           <a:xfrm>
-            <a:off x="1080000" y="1800000"/>
-            <a:ext cx="8640000" cy="1080000"/>
+            <a:off x="3600000" y="1440000"/>
+            <a:ext cx="7920000" cy="1440000"/>
           </a:xfrm>
           <a:prstGeom prst="rect">
             <a:avLst/>
@@ -3132,58 +3175,44 @@
           </a:bodyPr>
           <a:lstStyle/>
           <a:p>
-            <a:pPr algn="ctr">
-              <a:defRPr sz="3600" b="1">
-                <a:solidFill>
-                  <a:srgbClr val="1E293B"/>
-                </a:solidFill>
-              </a:defRPr>
-            </a:pPr>
-            <a:r>
-              <a:t>🧭 나침반 (NACHIMBAN)</a:t>
-            </a:r>
-          </a:p>
-          <a:p>
-            <a:pPr algn="ctr">
-              <a:defRPr sz="1600">
-                <a:solidFill>
-                  <a:srgbClr val="64748B"/>
-                </a:solidFill>
-              </a:defRPr>
-            </a:pPr>
-            <a:r>
-              <a:t>AI 기반 교육 공공데이터 활용 고등학교 진로 매칭 서비스</a:t>
-            </a:r>
-          </a:p>
-          <a:p/>
-          <a:p>
-            <a:pPr algn="ctr">
-              <a:defRPr sz="1200">
-                <a:solidFill>
-                  <a:srgbClr val="64748B"/>
-                </a:solidFill>
-              </a:defRPr>
-            </a:pPr>
-            <a:r>
-              <a:t>Navigating Academic Careers through Holistic Intelligence</a:t>
-            </a:r>
-            <a:br/>
-            <a:r>
-              <a:t>with Mined puBlic data And Networks</a:t>
-            </a:r>
-          </a:p>
-        </p:txBody>
-      </p:sp>
-      <p:sp>
-        <p:nvSpPr>
-          <p:cNvPr id="3" name="TextBox 2"/>
+            <a:pPr>
+              <a:defRPr sz="5400" b="1">
+                <a:solidFill>
+                  <a:srgbClr val="FFFFFF"/>
+                </a:solidFill>
+              </a:defRPr>
+            </a:pPr>
+            <a:r>
+              <a:t>나침반</a:t>
+            </a:r>
+          </a:p>
+          <a:p>
+            <a:pPr>
+              <a:spcBef>
+                <a:spcPts val="400"/>
+              </a:spcBef>
+              <a:defRPr sz="2000">
+                <a:solidFill>
+                  <a:srgbClr val="3B82F6"/>
+                </a:solidFill>
+              </a:defRPr>
+            </a:pPr>
+            <a:r>
+              <a:t>NACHIMBAN</a:t>
+            </a:r>
+          </a:p>
+        </p:txBody>
+      </p:sp>
+      <p:sp>
+        <p:nvSpPr>
+          <p:cNvPr id="4" name="TextBox 3"/>
           <p:cNvSpPr txBox="1"/>
           <p:nvPr/>
         </p:nvSpPr>
         <p:spPr>
           <a:xfrm>
-            <a:off x="1080000" y="5760000"/>
-            <a:ext cx="8640000" cy="1080000"/>
+            <a:off x="3600000" y="3600000"/>
+            <a:ext cx="7920000" cy="1080000"/>
           </a:xfrm>
           <a:prstGeom prst="rect">
             <a:avLst/>
@@ -3196,27 +3225,74 @@
           </a:bodyPr>
           <a:lstStyle/>
           <a:p>
-            <a:pPr algn="ctr">
+            <a:pPr>
+              <a:defRPr sz="1600">
+                <a:solidFill>
+                  <a:srgbClr val="CBD5E1"/>
+                </a:solidFill>
+              </a:defRPr>
+            </a:pPr>
+            <a:r>
+              <a:t>AI 기반 교육 공공데이터 활용</a:t>
+            </a:r>
+          </a:p>
+          <a:p>
+            <a:pPr>
+              <a:defRPr sz="1600">
+                <a:solidFill>
+                  <a:srgbClr val="CBD5E1"/>
+                </a:solidFill>
+              </a:defRPr>
+            </a:pPr>
+            <a:r>
+              <a:t>고등학교 진로 매칭 서비스</a:t>
+            </a:r>
+          </a:p>
+        </p:txBody>
+      </p:sp>
+      <p:sp>
+        <p:nvSpPr>
+          <p:cNvPr id="5" name="TextBox 4"/>
+          <p:cNvSpPr txBox="1"/>
+          <p:nvPr/>
+        </p:nvSpPr>
+        <p:spPr>
+          <a:xfrm>
+            <a:off x="3600000" y="5400000"/>
+            <a:ext cx="7920000" cy="720000"/>
+          </a:xfrm>
+          <a:prstGeom prst="rect">
+            <a:avLst/>
+          </a:prstGeom>
+          <a:noFill/>
+        </p:spPr>
+        <p:txBody>
+          <a:bodyPr wrap="none">
+            <a:spAutoFit/>
+          </a:bodyPr>
+          <a:lstStyle/>
+          <a:p>
+            <a:pPr>
               <a:defRPr sz="1200">
                 <a:solidFill>
-                  <a:srgbClr val="64748B"/>
-                </a:solidFill>
-              </a:defRPr>
-            </a:pPr>
-            <a:r>
-              <a:t>교육공공데이터 AI 활용 대회 | AI 활용 아이디어 기획 분야</a:t>
-            </a:r>
-          </a:p>
-          <a:p>
-            <a:pPr algn="ctr">
-              <a:defRPr sz="1200">
-                <a:solidFill>
-                  <a:srgbClr val="2563EB"/>
-                </a:solidFill>
-              </a:defRPr>
-            </a:pPr>
-            <a:r>
-              <a:t>서비스 URL: https://nachimban-nine.vercel.app</a:t>
+                  <a:srgbClr val="3B82F6"/>
+                </a:solidFill>
+              </a:defRPr>
+            </a:pPr>
+            <a:r>
+              <a:t>https://nachimban-nine.vercel.app</a:t>
+            </a:r>
+          </a:p>
+          <a:p>
+            <a:pPr>
+              <a:defRPr sz="1100">
+                <a:solidFill>
+                  <a:srgbClr val="94A3B8"/>
+                </a:solidFill>
+              </a:defRPr>
+            </a:pPr>
+            <a:r>
+              <a:t>교육공공데이터 AI 활용 대회 | AI 활용 아이디어 기획</a:t>
             </a:r>
           </a:p>
         </p:txBody>
@@ -3232,6 +3308,14 @@
 <file path=ppt/slides/slide10.xml><?xml version="1.0" encoding="utf-8"?>
 <p:sld xmlns:a="http://schemas.openxmlformats.org/drawingml/2006/main" xmlns:p="http://schemas.openxmlformats.org/presentationml/2006/main" xmlns:r="http://schemas.openxmlformats.org/officeDocument/2006/relationships">
   <p:cSld>
+    <p:bg>
+      <p:bgPr>
+        <a:solidFill>
+          <a:srgbClr val="FFFFFF"/>
+        </a:solidFill>
+        <a:effectLst/>
+      </p:bgPr>
+    </p:bg>
     <p:spTree>
       <p:nvGrpSpPr>
         <p:cNvPr id="1" name=""/>
@@ -3241,14 +3325,57 @@
       <p:grpSpPr/>
       <p:sp>
         <p:nvSpPr>
-          <p:cNvPr id="2" name="TextBox 1"/>
+          <p:cNvPr id="2" name="Rectangle 1"/>
+          <p:cNvSpPr/>
+          <p:nvPr/>
+        </p:nvSpPr>
+        <p:spPr>
+          <a:xfrm>
+            <a:off x="0" y="0"/>
+            <a:ext cx="288000" cy="6858000"/>
+          </a:xfrm>
+          <a:prstGeom prst="rect">
+            <a:avLst/>
+          </a:prstGeom>
+          <a:solidFill>
+            <a:srgbClr val="1D4ED8"/>
+          </a:solidFill>
+          <a:ln>
+            <a:noFill/>
+          </a:ln>
+        </p:spPr>
+        <p:style>
+          <a:lnRef idx="1">
+            <a:schemeClr val="accent1"/>
+          </a:lnRef>
+          <a:fillRef idx="3">
+            <a:schemeClr val="accent1"/>
+          </a:fillRef>
+          <a:effectRef idx="2">
+            <a:schemeClr val="accent1"/>
+          </a:effectRef>
+          <a:fontRef idx="minor">
+            <a:schemeClr val="lt1"/>
+          </a:fontRef>
+        </p:style>
+        <p:txBody>
+          <a:bodyPr rtlCol="0" anchor="ctr"/>
+          <a:lstStyle/>
+          <a:p>
+            <a:pPr algn="ctr"/>
+          </a:p>
+        </p:txBody>
+      </p:sp>
+      <p:sp>
+        <p:nvSpPr>
+          <p:cNvPr id="3" name="TextBox 2"/>
           <p:cNvSpPr txBox="1"/>
           <p:nvPr/>
         </p:nvSpPr>
         <p:spPr>
           <a:xfrm>
-            <a:off x="720000" y="180000"/>
-            <a:ext cx="9360000" cy="720000"/>
+            <a:off x="11160000" y="6300000"/>
+            <a:ext cx="720000" cy="360000"/>
           </a:xfrm>
           <a:prstGeom prst="rect">
             <a:avLst/>
@@ -3261,22 +3388,57 @@
           </a:bodyPr>
           <a:lstStyle/>
           <a:p>
-            <a:pPr>
-              <a:defRPr sz="2000" b="1">
-                <a:solidFill>
-                  <a:srgbClr val="1E293B"/>
-                </a:solidFill>
-              </a:defRPr>
-            </a:pPr>
-            <a:r>
-              <a:t>5-4. 데이터 분석: 직업 대분류별 MBTI 스펙트럼</a:t>
+            <a:pPr algn="r">
+              <a:defRPr sz="1000">
+                <a:solidFill>
+                  <a:srgbClr val="94A3B8"/>
+                </a:solidFill>
+              </a:defRPr>
+            </a:pPr>
+            <a:r>
+              <a:t>9</a:t>
+            </a:r>
+          </a:p>
+        </p:txBody>
+      </p:sp>
+      <p:sp>
+        <p:nvSpPr>
+          <p:cNvPr id="4" name="TextBox 3"/>
+          <p:cNvSpPr txBox="1"/>
+          <p:nvPr/>
+        </p:nvSpPr>
+        <p:spPr>
+          <a:xfrm>
+            <a:off x="900000" y="288000"/>
+            <a:ext cx="10080000" cy="720000"/>
+          </a:xfrm>
+          <a:prstGeom prst="rect">
+            <a:avLst/>
+          </a:prstGeom>
+          <a:noFill/>
+        </p:spPr>
+        <p:txBody>
+          <a:bodyPr wrap="none">
+            <a:spAutoFit/>
+          </a:bodyPr>
+          <a:lstStyle/>
+          <a:p>
+            <a:pPr>
+              <a:defRPr sz="2200" b="1">
+                <a:solidFill>
+                  <a:srgbClr val="0F172A"/>
+                </a:solidFill>
+              </a:defRPr>
+            </a:pPr>
+            <a:r>
+              <a:t>데이터 분석 ④ 직업 대분류별 MBTI 스펙트럼</a:t>
             </a:r>
           </a:p>
         </p:txBody>
       </p:sp>
       <p:pic>
         <p:nvPicPr>
-          <p:cNvPr id="3" name="Picture 2" descr="05_mbti_by_category.png"/>
+          <p:cNvPr id="5" name="Picture 4" descr="05_mbti_by_category.png"/>
           <p:cNvPicPr>
             <a:picLocks noChangeAspect="1"/>
           </p:cNvPicPr>
@@ -3290,8 +3452,8 @@
         </p:blipFill>
         <p:spPr>
           <a:xfrm>
-            <a:off x="1080000" y="1080000"/>
-            <a:ext cx="8640000" cy="5040000"/>
+            <a:off x="1440000" y="1080000"/>
+            <a:ext cx="9360000" cy="4860000"/>
           </a:xfrm>
           <a:prstGeom prst="rect">
             <a:avLst/>
@@ -3300,14 +3462,14 @@
       </p:pic>
       <p:sp>
         <p:nvSpPr>
-          <p:cNvPr id="4" name="TextBox 3"/>
+          <p:cNvPr id="6" name="TextBox 5"/>
           <p:cNvSpPr txBox="1"/>
           <p:nvPr/>
         </p:nvSpPr>
         <p:spPr>
           <a:xfrm>
-            <a:off x="720000" y="6480000"/>
-            <a:ext cx="9360000" cy="720000"/>
+            <a:off x="900000" y="6120000"/>
+            <a:ext cx="10440000" cy="540000"/>
           </a:xfrm>
           <a:prstGeom prst="rect">
             <a:avLst/>
@@ -3321,14 +3483,14 @@
           <a:lstStyle/>
           <a:p>
             <a:pPr algn="ctr">
-              <a:defRPr sz="1200">
+              <a:defRPr sz="1100">
                 <a:solidFill>
                   <a:srgbClr val="64748B"/>
                 </a:solidFill>
               </a:defRPr>
             </a:pPr>
             <a:r>
-              <a:t>연구직: I+T 성향 | 교육직: E+F 성향 | 예술직: N+P 성향 | 공공데이터 기반 패턴 확인</a:t>
+              <a:t>연구직: I+T 성향 | 교육직: E+F 성향 | 예술직: N+P 성향 | 대분류별 MBTI 패턴이 명확히 구분됨</a:t>
             </a:r>
           </a:p>
         </p:txBody>
@@ -3344,6 +3506,14 @@
 <file path=ppt/slides/slide11.xml><?xml version="1.0" encoding="utf-8"?>
 <p:sld xmlns:a="http://schemas.openxmlformats.org/drawingml/2006/main" xmlns:p="http://schemas.openxmlformats.org/presentationml/2006/main" xmlns:r="http://schemas.openxmlformats.org/officeDocument/2006/relationships">
   <p:cSld>
+    <p:bg>
+      <p:bgPr>
+        <a:solidFill>
+          <a:srgbClr val="FFFFFF"/>
+        </a:solidFill>
+        <a:effectLst/>
+      </p:bgPr>
+    </p:bg>
     <p:spTree>
       <p:nvGrpSpPr>
         <p:cNvPr id="1" name=""/>
@@ -3353,14 +3523,57 @@
       <p:grpSpPr/>
       <p:sp>
         <p:nvSpPr>
-          <p:cNvPr id="2" name="TextBox 1"/>
+          <p:cNvPr id="2" name="Rectangle 1"/>
+          <p:cNvSpPr/>
+          <p:nvPr/>
+        </p:nvSpPr>
+        <p:spPr>
+          <a:xfrm>
+            <a:off x="0" y="0"/>
+            <a:ext cx="288000" cy="6858000"/>
+          </a:xfrm>
+          <a:prstGeom prst="rect">
+            <a:avLst/>
+          </a:prstGeom>
+          <a:solidFill>
+            <a:srgbClr val="1D4ED8"/>
+          </a:solidFill>
+          <a:ln>
+            <a:noFill/>
+          </a:ln>
+        </p:spPr>
+        <p:style>
+          <a:lnRef idx="1">
+            <a:schemeClr val="accent1"/>
+          </a:lnRef>
+          <a:fillRef idx="3">
+            <a:schemeClr val="accent1"/>
+          </a:fillRef>
+          <a:effectRef idx="2">
+            <a:schemeClr val="accent1"/>
+          </a:effectRef>
+          <a:fontRef idx="minor">
+            <a:schemeClr val="lt1"/>
+          </a:fontRef>
+        </p:style>
+        <p:txBody>
+          <a:bodyPr rtlCol="0" anchor="ctr"/>
+          <a:lstStyle/>
+          <a:p>
+            <a:pPr algn="ctr"/>
+          </a:p>
+        </p:txBody>
+      </p:sp>
+      <p:sp>
+        <p:nvSpPr>
+          <p:cNvPr id="3" name="TextBox 2"/>
           <p:cNvSpPr txBox="1"/>
           <p:nvPr/>
         </p:nvSpPr>
         <p:spPr>
           <a:xfrm>
-            <a:off x="720000" y="180000"/>
-            <a:ext cx="9360000" cy="720000"/>
+            <a:off x="11160000" y="6300000"/>
+            <a:ext cx="720000" cy="360000"/>
           </a:xfrm>
           <a:prstGeom prst="rect">
             <a:avLst/>
@@ -3373,22 +3586,57 @@
           </a:bodyPr>
           <a:lstStyle/>
           <a:p>
-            <a:pPr>
-              <a:defRPr sz="2000" b="1">
-                <a:solidFill>
-                  <a:srgbClr val="1E293B"/>
-                </a:solidFill>
-              </a:defRPr>
-            </a:pPr>
-            <a:r>
-              <a:t>5-5. 데이터 분석: 가장 많이 개설된 과목 Top 20</a:t>
+            <a:pPr algn="r">
+              <a:defRPr sz="1000">
+                <a:solidFill>
+                  <a:srgbClr val="94A3B8"/>
+                </a:solidFill>
+              </a:defRPr>
+            </a:pPr>
+            <a:r>
+              <a:t>10</a:t>
+            </a:r>
+          </a:p>
+        </p:txBody>
+      </p:sp>
+      <p:sp>
+        <p:nvSpPr>
+          <p:cNvPr id="4" name="TextBox 3"/>
+          <p:cNvSpPr txBox="1"/>
+          <p:nvPr/>
+        </p:nvSpPr>
+        <p:spPr>
+          <a:xfrm>
+            <a:off x="900000" y="288000"/>
+            <a:ext cx="10080000" cy="720000"/>
+          </a:xfrm>
+          <a:prstGeom prst="rect">
+            <a:avLst/>
+          </a:prstGeom>
+          <a:noFill/>
+        </p:spPr>
+        <p:txBody>
+          <a:bodyPr wrap="none">
+            <a:spAutoFit/>
+          </a:bodyPr>
+          <a:lstStyle/>
+          <a:p>
+            <a:pPr>
+              <a:defRPr sz="2200" b="1">
+                <a:solidFill>
+                  <a:srgbClr val="0F172A"/>
+                </a:solidFill>
+              </a:defRPr>
+            </a:pPr>
+            <a:r>
+              <a:t>데이터 분석 ⑤ 전국 고등학교 인기 개설 과목</a:t>
             </a:r>
           </a:p>
         </p:txBody>
       </p:sp>
       <p:pic>
         <p:nvPicPr>
-          <p:cNvPr id="3" name="Picture 2" descr="07_popular_subjects.png"/>
+          <p:cNvPr id="5" name="Picture 4" descr="07_popular_subjects.png"/>
           <p:cNvPicPr>
             <a:picLocks noChangeAspect="1"/>
           </p:cNvPicPr>
@@ -3402,8 +3650,8 @@
         </p:blipFill>
         <p:spPr>
           <a:xfrm>
-            <a:off x="1080000" y="1080000"/>
-            <a:ext cx="8640000" cy="5040000"/>
+            <a:off x="1440000" y="1080000"/>
+            <a:ext cx="9360000" cy="4860000"/>
           </a:xfrm>
           <a:prstGeom prst="rect">
             <a:avLst/>
@@ -3412,14 +3660,14 @@
       </p:pic>
       <p:sp>
         <p:nvSpPr>
-          <p:cNvPr id="4" name="TextBox 3"/>
+          <p:cNvPr id="6" name="TextBox 5"/>
           <p:cNvSpPr txBox="1"/>
           <p:nvPr/>
         </p:nvSpPr>
         <p:spPr>
           <a:xfrm>
-            <a:off x="720000" y="6480000"/>
-            <a:ext cx="9360000" cy="720000"/>
+            <a:off x="900000" y="6120000"/>
+            <a:ext cx="10440000" cy="540000"/>
           </a:xfrm>
           <a:prstGeom prst="rect">
             <a:avLst/>
@@ -3433,14 +3681,14 @@
           <a:lstStyle/>
           <a:p>
             <a:pPr algn="ctr">
-              <a:defRPr sz="1200">
+              <a:defRPr sz="1100">
                 <a:solidFill>
                   <a:srgbClr val="64748B"/>
                 </a:solidFill>
               </a:defRPr>
             </a:pPr>
             <a:r>
-              <a:t>한국사·영어Ⅰ·수학Ⅰ이 대부분 학교에 개설 | 물리학Ⅱ·공학일반 등은 소수 학교만 개설</a:t>
+              <a:t>한국사·영어Ⅰ·수학Ⅰ = 대부분 개설 | 물리학Ⅱ·공학일반 등 진로 특화 과목은 소수 학교만 개설 → 학교 선택의 근거</a:t>
             </a:r>
           </a:p>
         </p:txBody>
@@ -3456,6 +3704,14 @@
 <file path=ppt/slides/slide12.xml><?xml version="1.0" encoding="utf-8"?>
 <p:sld xmlns:a="http://schemas.openxmlformats.org/drawingml/2006/main" xmlns:p="http://schemas.openxmlformats.org/presentationml/2006/main" xmlns:r="http://schemas.openxmlformats.org/officeDocument/2006/relationships">
   <p:cSld>
+    <p:bg>
+      <p:bgPr>
+        <a:solidFill>
+          <a:srgbClr val="FFFFFF"/>
+        </a:solidFill>
+        <a:effectLst/>
+      </p:bgPr>
+    </p:bg>
     <p:spTree>
       <p:nvGrpSpPr>
         <p:cNvPr id="1" name=""/>
@@ -3465,14 +3721,57 @@
       <p:grpSpPr/>
       <p:sp>
         <p:nvSpPr>
-          <p:cNvPr id="2" name="TextBox 1"/>
+          <p:cNvPr id="2" name="Rectangle 1"/>
+          <p:cNvSpPr/>
+          <p:nvPr/>
+        </p:nvSpPr>
+        <p:spPr>
+          <a:xfrm>
+            <a:off x="0" y="0"/>
+            <a:ext cx="288000" cy="6858000"/>
+          </a:xfrm>
+          <a:prstGeom prst="rect">
+            <a:avLst/>
+          </a:prstGeom>
+          <a:solidFill>
+            <a:srgbClr val="1D4ED8"/>
+          </a:solidFill>
+          <a:ln>
+            <a:noFill/>
+          </a:ln>
+        </p:spPr>
+        <p:style>
+          <a:lnRef idx="1">
+            <a:schemeClr val="accent1"/>
+          </a:lnRef>
+          <a:fillRef idx="3">
+            <a:schemeClr val="accent1"/>
+          </a:fillRef>
+          <a:effectRef idx="2">
+            <a:schemeClr val="accent1"/>
+          </a:effectRef>
+          <a:fontRef idx="minor">
+            <a:schemeClr val="lt1"/>
+          </a:fontRef>
+        </p:style>
+        <p:txBody>
+          <a:bodyPr rtlCol="0" anchor="ctr"/>
+          <a:lstStyle/>
+          <a:p>
+            <a:pPr algn="ctr"/>
+          </a:p>
+        </p:txBody>
+      </p:sp>
+      <p:sp>
+        <p:nvSpPr>
+          <p:cNvPr id="3" name="TextBox 2"/>
           <p:cNvSpPr txBox="1"/>
           <p:nvPr/>
         </p:nvSpPr>
         <p:spPr>
           <a:xfrm>
-            <a:off x="720000" y="360000"/>
-            <a:ext cx="9360000" cy="720000"/>
+            <a:off x="11160000" y="6300000"/>
+            <a:ext cx="720000" cy="360000"/>
           </a:xfrm>
           <a:prstGeom prst="rect">
             <a:avLst/>
@@ -3485,29 +3784,29 @@
           </a:bodyPr>
           <a:lstStyle/>
           <a:p>
-            <a:pPr>
-              <a:defRPr sz="2400" b="1">
-                <a:solidFill>
-                  <a:srgbClr val="1E293B"/>
-                </a:solidFill>
-              </a:defRPr>
-            </a:pPr>
-            <a:r>
-              <a:t>6. 기대효과 및 사회적 가치</a:t>
-            </a:r>
-          </a:p>
-        </p:txBody>
-      </p:sp>
-      <p:sp>
-        <p:nvSpPr>
-          <p:cNvPr id="3" name="TextBox 2"/>
+            <a:pPr algn="r">
+              <a:defRPr sz="1000">
+                <a:solidFill>
+                  <a:srgbClr val="94A3B8"/>
+                </a:solidFill>
+              </a:defRPr>
+            </a:pPr>
+            <a:r>
+              <a:t>11</a:t>
+            </a:r>
+          </a:p>
+        </p:txBody>
+      </p:sp>
+      <p:sp>
+        <p:nvSpPr>
+          <p:cNvPr id="4" name="TextBox 3"/>
           <p:cNvSpPr txBox="1"/>
           <p:nvPr/>
         </p:nvSpPr>
         <p:spPr>
           <a:xfrm>
-            <a:off x="720000" y="1440000"/>
-            <a:ext cx="9360000" cy="5400000"/>
+            <a:off x="900000" y="360000"/>
+            <a:ext cx="10080000" cy="900000"/>
           </a:xfrm>
           <a:prstGeom prst="rect">
             <a:avLst/>
@@ -3515,6 +3814,84 @@
           <a:noFill/>
         </p:spPr>
         <p:txBody>
+          <a:bodyPr wrap="none">
+            <a:spAutoFit/>
+          </a:bodyPr>
+          <a:lstStyle/>
+          <a:p>
+            <a:pPr>
+              <a:defRPr sz="2600" b="1">
+                <a:solidFill>
+                  <a:srgbClr val="0F172A"/>
+                </a:solidFill>
+              </a:defRPr>
+            </a:pPr>
+            <a:r>
+              <a:t>기대효과 및 사회적 가치</a:t>
+            </a:r>
+          </a:p>
+        </p:txBody>
+      </p:sp>
+      <p:sp>
+        <p:nvSpPr>
+          <p:cNvPr id="5" name="Rectangle 4"/>
+          <p:cNvSpPr/>
+          <p:nvPr/>
+        </p:nvSpPr>
+        <p:spPr>
+          <a:xfrm>
+            <a:off x="900000" y="1152000"/>
+            <a:ext cx="1440000" cy="36000"/>
+          </a:xfrm>
+          <a:prstGeom prst="rect">
+            <a:avLst/>
+          </a:prstGeom>
+          <a:solidFill>
+            <a:srgbClr val="3B82F6"/>
+          </a:solidFill>
+          <a:ln>
+            <a:noFill/>
+          </a:ln>
+        </p:spPr>
+        <p:style>
+          <a:lnRef idx="1">
+            <a:schemeClr val="accent1"/>
+          </a:lnRef>
+          <a:fillRef idx="3">
+            <a:schemeClr val="accent1"/>
+          </a:fillRef>
+          <a:effectRef idx="2">
+            <a:schemeClr val="accent1"/>
+          </a:effectRef>
+          <a:fontRef idx="minor">
+            <a:schemeClr val="lt1"/>
+          </a:fontRef>
+        </p:style>
+        <p:txBody>
+          <a:bodyPr rtlCol="0" anchor="ctr"/>
+          <a:lstStyle/>
+          <a:p>
+            <a:pPr algn="ctr"/>
+          </a:p>
+        </p:txBody>
+      </p:sp>
+      <p:sp>
+        <p:nvSpPr>
+          <p:cNvPr id="6" name="TextBox 5"/>
+          <p:cNvSpPr txBox="1"/>
+          <p:nvPr/>
+        </p:nvSpPr>
+        <p:spPr>
+          <a:xfrm>
+            <a:off x="900000" y="1440000"/>
+            <a:ext cx="10440000" cy="5040000"/>
+          </a:xfrm>
+          <a:prstGeom prst="rect">
+            <a:avLst/>
+          </a:prstGeom>
+          <a:noFill/>
+        </p:spPr>
+        <p:txBody>
           <a:bodyPr wrap="square">
             <a:spAutoFit/>
           </a:bodyPr>
@@ -3522,12 +3899,15 @@
           <a:p/>
           <a:p>
             <a:pPr>
-              <a:spcAft>
-                <a:spcPts val="400"/>
-              </a:spcAft>
-              <a:defRPr sz="1400" b="1">
-                <a:solidFill>
-                  <a:srgbClr val="2563EB"/>
+              <a:spcBef>
+                <a:spcPts val="1200"/>
+              </a:spcBef>
+              <a:spcAft>
+                <a:spcPts val="300"/>
+              </a:spcAft>
+              <a:defRPr sz="1500" b="1">
+                <a:solidFill>
+                  <a:srgbClr val="1D4ED8"/>
                 </a:solidFill>
               </a:defRPr>
             </a:pPr>
@@ -3538,39 +3918,39 @@
           <a:p>
             <a:pPr>
               <a:spcAft>
-                <a:spcPts val="400"/>
-              </a:spcAft>
-              <a:defRPr sz="1200">
+                <a:spcPts val="300"/>
+              </a:spcAft>
+              <a:defRPr sz="1300">
                 <a:solidFill>
                   <a:srgbClr val="1E293B"/>
                 </a:solidFill>
               </a:defRPr>
             </a:pPr>
             <a:r>
-              <a:t>  • 학생: 데이터 기반 객관적 진로 탐색, 적합 학교 발견</a:t>
-            </a:r>
-          </a:p>
-          <a:p>
-            <a:pPr>
-              <a:spcAft>
-                <a:spcPts val="400"/>
-              </a:spcAft>
-              <a:defRPr sz="1200">
+              <a:t>  • 학생: 데이터 기반 객관적 진로 탐색, 개인 특성에 맞는 학교 발견</a:t>
+            </a:r>
+          </a:p>
+          <a:p>
+            <a:pPr>
+              <a:spcAft>
+                <a:spcPts val="300"/>
+              </a:spcAft>
+              <a:defRPr sz="1300">
                 <a:solidFill>
                   <a:srgbClr val="1E293B"/>
                 </a:solidFill>
               </a:defRPr>
             </a:pPr>
             <a:r>
-              <a:t>  • 학부모: 자녀 특성에 맞는 교육 선택 근거 제공</a:t>
-            </a:r>
-          </a:p>
-          <a:p>
-            <a:pPr>
-              <a:spcAft>
-                <a:spcPts val="400"/>
-              </a:spcAft>
-              <a:defRPr sz="1200">
+              <a:t>  • 학부모: 자녀 적성 데이터로 교육 의사결정 근거 확보</a:t>
+            </a:r>
+          </a:p>
+          <a:p>
+            <a:pPr>
+              <a:spcAft>
+                <a:spcPts val="300"/>
+              </a:spcAft>
+              <a:defRPr sz="1300">
                 <a:solidFill>
                   <a:srgbClr val="1E293B"/>
                 </a:solidFill>
@@ -3583,22 +3963,47 @@
           <a:p>
             <a:pPr>
               <a:spcAft>
-                <a:spcPts val="400"/>
-              </a:spcAft>
-              <a:defRPr sz="1200">
+                <a:spcPts val="300"/>
+              </a:spcAft>
+              <a:defRPr sz="1300">
                 <a:solidFill>
                   <a:srgbClr val="1E293B"/>
                 </a:solidFill>
               </a:defRPr>
             </a:pPr>
             <a:r>
-              <a:t>  • 정책: 지역별 교육 인프라 격차 데이터 기반 파악</a:t>
-            </a:r>
-          </a:p>
-          <a:p>
-            <a:pPr>
-              <a:spcAft>
-                <a:spcPts val="400"/>
+              <a:t>  • 정책: 지역별 교과목 개설 격차 데이터 기반 파악</a:t>
+            </a:r>
+          </a:p>
+          <a:p>
+            <a:pPr>
+              <a:spcAft>
+                <a:spcPts val="800"/>
+              </a:spcAft>
+            </a:pPr>
+          </a:p>
+          <a:p>
+            <a:pPr>
+              <a:spcBef>
+                <a:spcPts val="1200"/>
+              </a:spcBef>
+              <a:spcAft>
+                <a:spcPts val="300"/>
+              </a:spcAft>
+              <a:defRPr sz="1500" b="1">
+                <a:solidFill>
+                  <a:srgbClr val="1D4ED8"/>
+                </a:solidFill>
+              </a:defRPr>
+            </a:pPr>
+            <a:r>
+              <a:t>▶ 사회적 가치</a:t>
+            </a:r>
+          </a:p>
+          <a:p>
+            <a:pPr>
+              <a:spcAft>
+                <a:spcPts val="300"/>
               </a:spcAft>
               <a:defRPr sz="1300">
                 <a:solidFill>
@@ -3606,95 +4011,68 @@
                 </a:solidFill>
               </a:defRPr>
             </a:pPr>
-          </a:p>
-          <a:p>
-            <a:pPr>
-              <a:spcAft>
-                <a:spcPts val="400"/>
-              </a:spcAft>
-              <a:defRPr sz="1400" b="1">
-                <a:solidFill>
-                  <a:srgbClr val="2563EB"/>
-                </a:solidFill>
-              </a:defRPr>
-            </a:pPr>
-            <a:r>
-              <a:t>▶ 사회적 가치</a:t>
-            </a:r>
-          </a:p>
-          <a:p>
-            <a:pPr>
-              <a:spcAft>
-                <a:spcPts val="400"/>
-              </a:spcAft>
-              <a:defRPr sz="1200">
+            <a:r>
+              <a:t>  • 교육 형평성 — 인프라 부족 지역에도 동일 품질의 AI 추천 제공</a:t>
+            </a:r>
+          </a:p>
+          <a:p>
+            <a:pPr>
+              <a:spcAft>
+                <a:spcPts val="300"/>
+              </a:spcAft>
+              <a:defRPr sz="1300">
                 <a:solidFill>
                   <a:srgbClr val="1E293B"/>
                 </a:solidFill>
               </a:defRPr>
             </a:pPr>
             <a:r>
-              <a:t>  • 교육 형평성: 농어촌·소외 지역에도 동일 품질의 AI 추천</a:t>
-            </a:r>
-          </a:p>
-          <a:p>
-            <a:pPr>
-              <a:spcAft>
-                <a:spcPts val="400"/>
-              </a:spcAft>
-              <a:defRPr sz="1200">
+              <a:t>  • 정보 접근성 — 나이스+워크넷 공공데이터를 하나의 서비스로 통합</a:t>
+            </a:r>
+          </a:p>
+          <a:p>
+            <a:pPr>
+              <a:spcAft>
+                <a:spcPts val="300"/>
+              </a:spcAft>
+              <a:defRPr sz="1300">
                 <a:solidFill>
                   <a:srgbClr val="1E293B"/>
                 </a:solidFill>
               </a:defRPr>
             </a:pPr>
             <a:r>
-              <a:t>  • 정보 접근성: 산재된 공공데이터를 하나의 서비스로 통합</a:t>
-            </a:r>
-          </a:p>
-          <a:p>
-            <a:pPr>
-              <a:spcAft>
-                <a:spcPts val="400"/>
-              </a:spcAft>
-              <a:defRPr sz="1200">
+              <a:t>  • 개인 맞춤화 — 256가지+ MBTI 조합으로 획일적 진로지도 탈피</a:t>
+            </a:r>
+          </a:p>
+          <a:p>
+            <a:pPr>
+              <a:spcAft>
+                <a:spcPts val="300"/>
+              </a:spcAft>
+              <a:defRPr sz="1300">
                 <a:solidFill>
                   <a:srgbClr val="1E293B"/>
                 </a:solidFill>
               </a:defRPr>
             </a:pPr>
             <a:r>
-              <a:t>  • 개인 맞춤화: 256가지+ MBTI 조합으로 획일적 진로지도 탈피</a:t>
-            </a:r>
-          </a:p>
-          <a:p>
-            <a:pPr>
-              <a:spcAft>
-                <a:spcPts val="400"/>
-              </a:spcAft>
-              <a:defRPr sz="1200">
+              <a:t>  • 공공데이터 활용 — 세금으로 구축된 데이터의 교육 현장 환원</a:t>
+            </a:r>
+          </a:p>
+          <a:p>
+            <a:pPr>
+              <a:spcAft>
+                <a:spcPts val="300"/>
+              </a:spcAft>
+              <a:defRPr sz="1300">
                 <a:solidFill>
                   <a:srgbClr val="1E293B"/>
                 </a:solidFill>
               </a:defRPr>
             </a:pPr>
             <a:r>
-              <a:t>  • 공공데이터 활용: 세금으로 구축된 데이터의 실질적 활용 모범 사례</a:t>
-            </a:r>
-          </a:p>
-          <a:p>
-            <a:pPr>
-              <a:spcAft>
-                <a:spcPts val="400"/>
-              </a:spcAft>
-              <a:defRPr sz="1200">
-                <a:solidFill>
-                  <a:srgbClr val="1E293B"/>
-                </a:solidFill>
-              </a:defRPr>
-            </a:pPr>
-            <a:r>
-              <a:t>  • 의사결정 지원: 감이 아닌 데이터 기반 진로 선택 문화 조성</a:t>
+              <a:t>  • 의사결정 지원 — 감이 아닌 데이터 기반 진로 선택 문화 조성</a:t>
             </a:r>
           </a:p>
         </p:txBody>
@@ -3710,6 +4088,14 @@
 <file path=ppt/slides/slide13.xml><?xml version="1.0" encoding="utf-8"?>
 <p:sld xmlns:a="http://schemas.openxmlformats.org/drawingml/2006/main" xmlns:p="http://schemas.openxmlformats.org/presentationml/2006/main" xmlns:r="http://schemas.openxmlformats.org/officeDocument/2006/relationships">
   <p:cSld>
+    <p:bg>
+      <p:bgPr>
+        <a:solidFill>
+          <a:srgbClr val="FFFFFF"/>
+        </a:solidFill>
+        <a:effectLst/>
+      </p:bgPr>
+    </p:bg>
     <p:spTree>
       <p:nvGrpSpPr>
         <p:cNvPr id="1" name=""/>
@@ -3719,14 +4105,57 @@
       <p:grpSpPr/>
       <p:sp>
         <p:nvSpPr>
-          <p:cNvPr id="2" name="TextBox 1"/>
+          <p:cNvPr id="2" name="Rectangle 1"/>
+          <p:cNvSpPr/>
+          <p:nvPr/>
+        </p:nvSpPr>
+        <p:spPr>
+          <a:xfrm>
+            <a:off x="0" y="0"/>
+            <a:ext cx="288000" cy="6858000"/>
+          </a:xfrm>
+          <a:prstGeom prst="rect">
+            <a:avLst/>
+          </a:prstGeom>
+          <a:solidFill>
+            <a:srgbClr val="1D4ED8"/>
+          </a:solidFill>
+          <a:ln>
+            <a:noFill/>
+          </a:ln>
+        </p:spPr>
+        <p:style>
+          <a:lnRef idx="1">
+            <a:schemeClr val="accent1"/>
+          </a:lnRef>
+          <a:fillRef idx="3">
+            <a:schemeClr val="accent1"/>
+          </a:fillRef>
+          <a:effectRef idx="2">
+            <a:schemeClr val="accent1"/>
+          </a:effectRef>
+          <a:fontRef idx="minor">
+            <a:schemeClr val="lt1"/>
+          </a:fontRef>
+        </p:style>
+        <p:txBody>
+          <a:bodyPr rtlCol="0" anchor="ctr"/>
+          <a:lstStyle/>
+          <a:p>
+            <a:pPr algn="ctr"/>
+          </a:p>
+        </p:txBody>
+      </p:sp>
+      <p:sp>
+        <p:nvSpPr>
+          <p:cNvPr id="3" name="TextBox 2"/>
           <p:cNvSpPr txBox="1"/>
           <p:nvPr/>
         </p:nvSpPr>
         <p:spPr>
           <a:xfrm>
-            <a:off x="720000" y="360000"/>
-            <a:ext cx="9360000" cy="720000"/>
+            <a:off x="11160000" y="6300000"/>
+            <a:ext cx="720000" cy="360000"/>
           </a:xfrm>
           <a:prstGeom prst="rect">
             <a:avLst/>
@@ -3739,29 +4168,29 @@
           </a:bodyPr>
           <a:lstStyle/>
           <a:p>
-            <a:pPr>
-              <a:defRPr sz="2400" b="1">
-                <a:solidFill>
-                  <a:srgbClr val="1E293B"/>
-                </a:solidFill>
-              </a:defRPr>
-            </a:pPr>
-            <a:r>
-              <a:t>7. 기술 아키텍처</a:t>
-            </a:r>
-          </a:p>
-        </p:txBody>
-      </p:sp>
-      <p:sp>
-        <p:nvSpPr>
-          <p:cNvPr id="3" name="TextBox 2"/>
+            <a:pPr algn="r">
+              <a:defRPr sz="1000">
+                <a:solidFill>
+                  <a:srgbClr val="94A3B8"/>
+                </a:solidFill>
+              </a:defRPr>
+            </a:pPr>
+            <a:r>
+              <a:t>12</a:t>
+            </a:r>
+          </a:p>
+        </p:txBody>
+      </p:sp>
+      <p:sp>
+        <p:nvSpPr>
+          <p:cNvPr id="4" name="TextBox 3"/>
           <p:cNvSpPr txBox="1"/>
           <p:nvPr/>
         </p:nvSpPr>
         <p:spPr>
           <a:xfrm>
-            <a:off x="720000" y="1440000"/>
-            <a:ext cx="9360000" cy="5400000"/>
+            <a:off x="900000" y="360000"/>
+            <a:ext cx="10080000" cy="900000"/>
           </a:xfrm>
           <a:prstGeom prst="rect">
             <a:avLst/>
@@ -3769,6 +4198,84 @@
           <a:noFill/>
         </p:spPr>
         <p:txBody>
+          <a:bodyPr wrap="none">
+            <a:spAutoFit/>
+          </a:bodyPr>
+          <a:lstStyle/>
+          <a:p>
+            <a:pPr>
+              <a:defRPr sz="2600" b="1">
+                <a:solidFill>
+                  <a:srgbClr val="0F172A"/>
+                </a:solidFill>
+              </a:defRPr>
+            </a:pPr>
+            <a:r>
+              <a:t>기술 아키텍처</a:t>
+            </a:r>
+          </a:p>
+        </p:txBody>
+      </p:sp>
+      <p:sp>
+        <p:nvSpPr>
+          <p:cNvPr id="5" name="Rectangle 4"/>
+          <p:cNvSpPr/>
+          <p:nvPr/>
+        </p:nvSpPr>
+        <p:spPr>
+          <a:xfrm>
+            <a:off x="900000" y="1152000"/>
+            <a:ext cx="1440000" cy="36000"/>
+          </a:xfrm>
+          <a:prstGeom prst="rect">
+            <a:avLst/>
+          </a:prstGeom>
+          <a:solidFill>
+            <a:srgbClr val="3B82F6"/>
+          </a:solidFill>
+          <a:ln>
+            <a:noFill/>
+          </a:ln>
+        </p:spPr>
+        <p:style>
+          <a:lnRef idx="1">
+            <a:schemeClr val="accent1"/>
+          </a:lnRef>
+          <a:fillRef idx="3">
+            <a:schemeClr val="accent1"/>
+          </a:fillRef>
+          <a:effectRef idx="2">
+            <a:schemeClr val="accent1"/>
+          </a:effectRef>
+          <a:fontRef idx="minor">
+            <a:schemeClr val="lt1"/>
+          </a:fontRef>
+        </p:style>
+        <p:txBody>
+          <a:bodyPr rtlCol="0" anchor="ctr"/>
+          <a:lstStyle/>
+          <a:p>
+            <a:pPr algn="ctr"/>
+          </a:p>
+        </p:txBody>
+      </p:sp>
+      <p:sp>
+        <p:nvSpPr>
+          <p:cNvPr id="6" name="TextBox 5"/>
+          <p:cNvSpPr txBox="1"/>
+          <p:nvPr/>
+        </p:nvSpPr>
+        <p:spPr>
+          <a:xfrm>
+            <a:off x="900000" y="1440000"/>
+            <a:ext cx="10440000" cy="5040000"/>
+          </a:xfrm>
+          <a:prstGeom prst="rect">
+            <a:avLst/>
+          </a:prstGeom>
+          <a:noFill/>
+        </p:spPr>
+        <p:txBody>
           <a:bodyPr wrap="square">
             <a:spAutoFit/>
           </a:bodyPr>
@@ -3776,12 +4283,15 @@
           <a:p/>
           <a:p>
             <a:pPr>
-              <a:spcAft>
-                <a:spcPts val="400"/>
-              </a:spcAft>
-              <a:defRPr sz="1400" b="1">
-                <a:solidFill>
-                  <a:srgbClr val="2563EB"/>
+              <a:spcBef>
+                <a:spcPts val="1200"/>
+              </a:spcBef>
+              <a:spcAft>
+                <a:spcPts val="300"/>
+              </a:spcAft>
+              <a:defRPr sz="1500" b="1">
+                <a:solidFill>
+                  <a:srgbClr val="1D4ED8"/>
                 </a:solidFill>
               </a:defRPr>
             </a:pPr>
@@ -3792,52 +4302,77 @@
           <a:p>
             <a:pPr>
               <a:spcAft>
-                <a:spcPts val="400"/>
-              </a:spcAft>
-              <a:defRPr sz="1200">
+                <a:spcPts val="300"/>
+              </a:spcAft>
+              <a:defRPr sz="1300">
                 <a:solidFill>
                   <a:srgbClr val="1E293B"/>
                 </a:solidFill>
               </a:defRPr>
             </a:pPr>
             <a:r>
-              <a:t>  • Frontend: React + TypeScript + Tailwind CSS + Recharts (Vercel 배포)</a:t>
-            </a:r>
-          </a:p>
-          <a:p>
-            <a:pPr>
-              <a:spcAft>
-                <a:spcPts val="400"/>
-              </a:spcAft>
-              <a:defRPr sz="1200">
+              <a:t>  • Frontend: React + TypeScript + Tailwind CSS + Recharts → Vercel 배포</a:t>
+            </a:r>
+          </a:p>
+          <a:p>
+            <a:pPr>
+              <a:spcAft>
+                <a:spcPts val="300"/>
+              </a:spcAft>
+              <a:defRPr sz="1300">
                 <a:solidFill>
                   <a:srgbClr val="1E293B"/>
                 </a:solidFill>
               </a:defRPr>
             </a:pPr>
             <a:r>
-              <a:t>  • Backend: Python FastAPI + AI 매칭 엔진 (Render 배포)</a:t>
-            </a:r>
-          </a:p>
-          <a:p>
-            <a:pPr>
-              <a:spcAft>
-                <a:spcPts val="400"/>
-              </a:spcAft>
-              <a:defRPr sz="1200">
+              <a:t>  • Backend: Python FastAPI + AI 매칭 엔진 → Render 배포</a:t>
+            </a:r>
+          </a:p>
+          <a:p>
+            <a:pPr>
+              <a:spcAft>
+                <a:spcPts val="300"/>
+              </a:spcAft>
+              <a:defRPr sz="1300">
                 <a:solidFill>
                   <a:srgbClr val="1E293B"/>
                 </a:solidFill>
               </a:defRPr>
             </a:pPr>
             <a:r>
-              <a:t>  • 데이터: 나이스 + 워크넷 공공데이터 (CSV, REST API)</a:t>
-            </a:r>
-          </a:p>
-          <a:p>
-            <a:pPr>
-              <a:spcAft>
-                <a:spcPts val="400"/>
+              <a:t>  • 데이터: 나이스 API + 워크넷 API → CSV 가공 → 매칭 엔진에 로드</a:t>
+            </a:r>
+          </a:p>
+          <a:p>
+            <a:pPr>
+              <a:spcAft>
+                <a:spcPts val="800"/>
+              </a:spcAft>
+            </a:pPr>
+          </a:p>
+          <a:p>
+            <a:pPr>
+              <a:spcBef>
+                <a:spcPts val="1200"/>
+              </a:spcBef>
+              <a:spcAft>
+                <a:spcPts val="300"/>
+              </a:spcAft>
+              <a:defRPr sz="1500" b="1">
+                <a:solidFill>
+                  <a:srgbClr val="1D4ED8"/>
+                </a:solidFill>
+              </a:defRPr>
+            </a:pPr>
+            <a:r>
+              <a:t>▶ AI 매칭 엔진 핵심 로직</a:t>
+            </a:r>
+          </a:p>
+          <a:p>
+            <a:pPr>
+              <a:spcAft>
+                <a:spcPts val="300"/>
               </a:spcAft>
               <a:defRPr sz="1300">
                 <a:solidFill>
@@ -3845,71 +4380,84 @@
                 </a:solidFill>
               </a:defRPr>
             </a:pPr>
-          </a:p>
-          <a:p>
-            <a:pPr>
-              <a:spcAft>
-                <a:spcPts val="400"/>
-              </a:spcAft>
-              <a:defRPr sz="1400" b="1">
-                <a:solidFill>
-                  <a:srgbClr val="2563EB"/>
-                </a:solidFill>
-              </a:defRPr>
-            </a:pPr>
-            <a:r>
-              <a:t>▶ AI 매칭 엔진</a:t>
-            </a:r>
-          </a:p>
-          <a:p>
-            <a:pPr>
-              <a:spcAft>
-                <a:spcPts val="400"/>
-              </a:spcAft>
-              <a:defRPr sz="1200">
+            <a:r>
+              <a:t>  • Holland: 학생 6축 벡터 ↔ 직업 6축 벡터 → 코사인 유사도(0~100)</a:t>
+            </a:r>
+          </a:p>
+          <a:p>
+            <a:pPr>
+              <a:spcAft>
+                <a:spcPts val="300"/>
+              </a:spcAft>
+              <a:defRPr sz="1300">
                 <a:solidFill>
                   <a:srgbClr val="1E293B"/>
                 </a:solidFill>
               </a:defRPr>
             </a:pPr>
             <a:r>
-              <a:t>  • Holland 매칭: 코사인 유사도 (학생 6축 벡터 ↔ 직업 6축 벡터)</a:t>
-            </a:r>
-          </a:p>
-          <a:p>
-            <a:pPr>
-              <a:spcAft>
-                <a:spcPts val="400"/>
-              </a:spcAft>
-              <a:defRPr sz="1200">
+              <a:t>  • MBTI: 학생 4축 ↔ 직업 4축 → 유클리드 거리 → 유사도(0~100)</a:t>
+            </a:r>
+          </a:p>
+          <a:p>
+            <a:pPr>
+              <a:spcAft>
+                <a:spcPts val="300"/>
+              </a:spcAft>
+              <a:defRPr sz="1300">
                 <a:solidFill>
                   <a:srgbClr val="1E293B"/>
                 </a:solidFill>
               </a:defRPr>
             </a:pPr>
             <a:r>
-              <a:t>  • MBTI 매칭: 유클리드 거리 (학생 4축 ↔ 직업 4축, 0~100 연속값)</a:t>
-            </a:r>
-          </a:p>
-          <a:p>
-            <a:pPr>
-              <a:spcAft>
-                <a:spcPts val="400"/>
-              </a:spcAft>
-              <a:defRPr sz="1200">
+              <a:t>  • 최종 점수 = Holland × 0.6 + MBTI × 0.4</a:t>
+            </a:r>
+          </a:p>
+          <a:p>
+            <a:pPr>
+              <a:spcAft>
+                <a:spcPts val="800"/>
+              </a:spcAft>
+            </a:pPr>
+          </a:p>
+          <a:p>
+            <a:pPr>
+              <a:spcBef>
+                <a:spcPts val="1200"/>
+              </a:spcBef>
+              <a:spcAft>
+                <a:spcPts val="300"/>
+              </a:spcAft>
+              <a:defRPr sz="1500" b="1">
+                <a:solidFill>
+                  <a:srgbClr val="1D4ED8"/>
+                </a:solidFill>
+              </a:defRPr>
+            </a:pPr>
+            <a:r>
+              <a:t>▶ 학교 매칭 점수</a:t>
+            </a:r>
+          </a:p>
+          <a:p>
+            <a:pPr>
+              <a:spcAft>
+                <a:spcPts val="300"/>
+              </a:spcAft>
+              <a:defRPr sz="1300">
                 <a:solidFill>
                   <a:srgbClr val="1E293B"/>
                 </a:solidFill>
               </a:defRPr>
             </a:pPr>
             <a:r>
-              <a:t>  • 학교 매칭: 교과목 커버리지 + 학교유형 보너스 + 근접도 보너스</a:t>
-            </a:r>
-          </a:p>
-          <a:p>
-            <a:pPr>
-              <a:spcAft>
-                <a:spcPts val="400"/>
+              <a:t>  • 기본: 진로 필수 교과목 개설 비율 (개설 수 / 전체 필수 과목 수) × 100</a:t>
+            </a:r>
+          </a:p>
+          <a:p>
+            <a:pPr>
+              <a:spcAft>
+                <a:spcPts val="300"/>
               </a:spcAft>
               <a:defRPr sz="1300">
                 <a:solidFill>
@@ -3917,50 +4465,23 @@
                 </a:solidFill>
               </a:defRPr>
             </a:pPr>
-          </a:p>
-          <a:p>
-            <a:pPr>
-              <a:spcAft>
-                <a:spcPts val="400"/>
-              </a:spcAft>
-              <a:defRPr sz="1400" b="1">
-                <a:solidFill>
-                  <a:srgbClr val="2563EB"/>
-                </a:solidFill>
-              </a:defRPr>
-            </a:pPr>
-            <a:r>
-              <a:t>▶ 매칭 가중치</a:t>
-            </a:r>
-          </a:p>
-          <a:p>
-            <a:pPr>
-              <a:spcAft>
-                <a:spcPts val="400"/>
-              </a:spcAft>
-              <a:defRPr sz="1200">
+            <a:r>
+              <a:t>  • 보너스: 특목고 +5점, 자율고 +3점, 같은 동 +8점, 같은 구 +3점</a:t>
+            </a:r>
+          </a:p>
+          <a:p>
+            <a:pPr>
+              <a:spcAft>
+                <a:spcPts val="300"/>
+              </a:spcAft>
+              <a:defRPr sz="1300">
                 <a:solidFill>
                   <a:srgbClr val="1E293B"/>
                 </a:solidFill>
               </a:defRPr>
             </a:pPr>
             <a:r>
-              <a:t>  • 진로 추천 = Holland(60%) + MBTI(40%)</a:t>
-            </a:r>
-          </a:p>
-          <a:p>
-            <a:pPr>
-              <a:spcAft>
-                <a:spcPts val="400"/>
-              </a:spcAft>
-              <a:defRPr sz="1200">
-                <a:solidFill>
-                  <a:srgbClr val="1E293B"/>
-                </a:solidFill>
-              </a:defRPr>
-            </a:pPr>
-            <a:r>
-              <a:t>  • 학교 추천 = 교과목 커버리지 + 유형(+5) + 동일 동(+8) / 동일 구(+3)</a:t>
+              <a:t>  • 필터: 성별(남→여학교 제외), 거주지(시군구 우선 → 시도 확장)</a:t>
             </a:r>
           </a:p>
         </p:txBody>
@@ -3976,6 +4497,14 @@
 <file path=ppt/slides/slide14.xml><?xml version="1.0" encoding="utf-8"?>
 <p:sld xmlns:a="http://schemas.openxmlformats.org/drawingml/2006/main" xmlns:p="http://schemas.openxmlformats.org/presentationml/2006/main" xmlns:r="http://schemas.openxmlformats.org/officeDocument/2006/relationships">
   <p:cSld>
+    <p:bg>
+      <p:bgPr>
+        <a:solidFill>
+          <a:srgbClr val="FFFFFF"/>
+        </a:solidFill>
+        <a:effectLst/>
+      </p:bgPr>
+    </p:bg>
     <p:spTree>
       <p:nvGrpSpPr>
         <p:cNvPr id="1" name=""/>
@@ -3985,14 +4514,57 @@
       <p:grpSpPr/>
       <p:sp>
         <p:nvSpPr>
-          <p:cNvPr id="2" name="TextBox 1"/>
+          <p:cNvPr id="2" name="Rectangle 1"/>
+          <p:cNvSpPr/>
+          <p:nvPr/>
+        </p:nvSpPr>
+        <p:spPr>
+          <a:xfrm>
+            <a:off x="0" y="0"/>
+            <a:ext cx="288000" cy="6858000"/>
+          </a:xfrm>
+          <a:prstGeom prst="rect">
+            <a:avLst/>
+          </a:prstGeom>
+          <a:solidFill>
+            <a:srgbClr val="1D4ED8"/>
+          </a:solidFill>
+          <a:ln>
+            <a:noFill/>
+          </a:ln>
+        </p:spPr>
+        <p:style>
+          <a:lnRef idx="1">
+            <a:schemeClr val="accent1"/>
+          </a:lnRef>
+          <a:fillRef idx="3">
+            <a:schemeClr val="accent1"/>
+          </a:fillRef>
+          <a:effectRef idx="2">
+            <a:schemeClr val="accent1"/>
+          </a:effectRef>
+          <a:fontRef idx="minor">
+            <a:schemeClr val="lt1"/>
+          </a:fontRef>
+        </p:style>
+        <p:txBody>
+          <a:bodyPr rtlCol="0" anchor="ctr"/>
+          <a:lstStyle/>
+          <a:p>
+            <a:pPr algn="ctr"/>
+          </a:p>
+        </p:txBody>
+      </p:sp>
+      <p:sp>
+        <p:nvSpPr>
+          <p:cNvPr id="3" name="TextBox 2"/>
           <p:cNvSpPr txBox="1"/>
           <p:nvPr/>
         </p:nvSpPr>
         <p:spPr>
           <a:xfrm>
-            <a:off x="720000" y="360000"/>
-            <a:ext cx="9360000" cy="720000"/>
+            <a:off x="11160000" y="6300000"/>
+            <a:ext cx="720000" cy="360000"/>
           </a:xfrm>
           <a:prstGeom prst="rect">
             <a:avLst/>
@@ -4005,29 +4577,29 @@
           </a:bodyPr>
           <a:lstStyle/>
           <a:p>
-            <a:pPr>
-              <a:defRPr sz="2400" b="1">
-                <a:solidFill>
-                  <a:srgbClr val="1E293B"/>
-                </a:solidFill>
-              </a:defRPr>
-            </a:pPr>
-            <a:r>
-              <a:t>8. 향후 발전 방향</a:t>
-            </a:r>
-          </a:p>
-        </p:txBody>
-      </p:sp>
-      <p:sp>
-        <p:nvSpPr>
-          <p:cNvPr id="3" name="TextBox 2"/>
+            <a:pPr algn="r">
+              <a:defRPr sz="1000">
+                <a:solidFill>
+                  <a:srgbClr val="94A3B8"/>
+                </a:solidFill>
+              </a:defRPr>
+            </a:pPr>
+            <a:r>
+              <a:t>13</a:t>
+            </a:r>
+          </a:p>
+        </p:txBody>
+      </p:sp>
+      <p:sp>
+        <p:nvSpPr>
+          <p:cNvPr id="4" name="TextBox 3"/>
           <p:cNvSpPr txBox="1"/>
           <p:nvPr/>
         </p:nvSpPr>
         <p:spPr>
           <a:xfrm>
-            <a:off x="720000" y="1440000"/>
-            <a:ext cx="9360000" cy="5400000"/>
+            <a:off x="900000" y="360000"/>
+            <a:ext cx="10080000" cy="900000"/>
           </a:xfrm>
           <a:prstGeom prst="rect">
             <a:avLst/>
@@ -4035,6 +4607,84 @@
           <a:noFill/>
         </p:spPr>
         <p:txBody>
+          <a:bodyPr wrap="none">
+            <a:spAutoFit/>
+          </a:bodyPr>
+          <a:lstStyle/>
+          <a:p>
+            <a:pPr>
+              <a:defRPr sz="2600" b="1">
+                <a:solidFill>
+                  <a:srgbClr val="0F172A"/>
+                </a:solidFill>
+              </a:defRPr>
+            </a:pPr>
+            <a:r>
+              <a:t>향후 발전 방향</a:t>
+            </a:r>
+          </a:p>
+        </p:txBody>
+      </p:sp>
+      <p:sp>
+        <p:nvSpPr>
+          <p:cNvPr id="5" name="Rectangle 4"/>
+          <p:cNvSpPr/>
+          <p:nvPr/>
+        </p:nvSpPr>
+        <p:spPr>
+          <a:xfrm>
+            <a:off x="900000" y="1152000"/>
+            <a:ext cx="1440000" cy="36000"/>
+          </a:xfrm>
+          <a:prstGeom prst="rect">
+            <a:avLst/>
+          </a:prstGeom>
+          <a:solidFill>
+            <a:srgbClr val="3B82F6"/>
+          </a:solidFill>
+          <a:ln>
+            <a:noFill/>
+          </a:ln>
+        </p:spPr>
+        <p:style>
+          <a:lnRef idx="1">
+            <a:schemeClr val="accent1"/>
+          </a:lnRef>
+          <a:fillRef idx="3">
+            <a:schemeClr val="accent1"/>
+          </a:fillRef>
+          <a:effectRef idx="2">
+            <a:schemeClr val="accent1"/>
+          </a:effectRef>
+          <a:fontRef idx="minor">
+            <a:schemeClr val="lt1"/>
+          </a:fontRef>
+        </p:style>
+        <p:txBody>
+          <a:bodyPr rtlCol="0" anchor="ctr"/>
+          <a:lstStyle/>
+          <a:p>
+            <a:pPr algn="ctr"/>
+          </a:p>
+        </p:txBody>
+      </p:sp>
+      <p:sp>
+        <p:nvSpPr>
+          <p:cNvPr id="6" name="TextBox 5"/>
+          <p:cNvSpPr txBox="1"/>
+          <p:nvPr/>
+        </p:nvSpPr>
+        <p:spPr>
+          <a:xfrm>
+            <a:off x="900000" y="1440000"/>
+            <a:ext cx="10440000" cy="5040000"/>
+          </a:xfrm>
+          <a:prstGeom prst="rect">
+            <a:avLst/>
+          </a:prstGeom>
+          <a:noFill/>
+        </p:spPr>
+        <p:txBody>
           <a:bodyPr wrap="square">
             <a:spAutoFit/>
           </a:bodyPr>
@@ -4042,12 +4692,15 @@
           <a:p/>
           <a:p>
             <a:pPr>
-              <a:spcAft>
-                <a:spcPts val="400"/>
-              </a:spcAft>
-              <a:defRPr sz="1400" b="1">
-                <a:solidFill>
-                  <a:srgbClr val="2563EB"/>
+              <a:spcBef>
+                <a:spcPts val="1200"/>
+              </a:spcBef>
+              <a:spcAft>
+                <a:spcPts val="300"/>
+              </a:spcAft>
+              <a:defRPr sz="1500" b="1">
+                <a:solidFill>
+                  <a:srgbClr val="1D4ED8"/>
                 </a:solidFill>
               </a:defRPr>
             </a:pPr>
@@ -4058,9 +4711,9 @@
           <a:p>
             <a:pPr>
               <a:spcAft>
-                <a:spcPts val="400"/>
-              </a:spcAft>
-              <a:defRPr sz="1200">
+                <a:spcPts val="300"/>
+              </a:spcAft>
+              <a:defRPr sz="1300">
                 <a:solidFill>
                   <a:srgbClr val="1E293B"/>
                 </a:solidFill>
@@ -4073,37 +4726,62 @@
           <a:p>
             <a:pPr>
               <a:spcAft>
-                <a:spcPts val="400"/>
-              </a:spcAft>
-              <a:defRPr sz="1200">
+                <a:spcPts val="300"/>
+              </a:spcAft>
+              <a:defRPr sz="1300">
                 <a:solidFill>
                   <a:srgbClr val="1E293B"/>
                 </a:solidFill>
               </a:defRPr>
             </a:pPr>
             <a:r>
-              <a:t>  • 졸업생 진로 현황 데이터 반영 → 학교 추천 근거 강화</a:t>
-            </a:r>
-          </a:p>
-          <a:p>
-            <a:pPr>
-              <a:spcAft>
-                <a:spcPts val="400"/>
-              </a:spcAft>
-              <a:defRPr sz="1200">
+              <a:t>  • 졸업생 진로 현황 데이터 → 학교별 실제 진학 실적 기반 추천</a:t>
+            </a:r>
+          </a:p>
+          <a:p>
+            <a:pPr>
+              <a:spcAft>
+                <a:spcPts val="300"/>
+              </a:spcAft>
+              <a:defRPr sz="1300">
                 <a:solidFill>
                   <a:srgbClr val="1E293B"/>
                 </a:solidFill>
               </a:defRPr>
             </a:pPr>
             <a:r>
-              <a:t>  • 대학 입시 전형 데이터 연계</a:t>
-            </a:r>
-          </a:p>
-          <a:p>
-            <a:pPr>
-              <a:spcAft>
-                <a:spcPts val="400"/>
+              <a:t>  • 대학 입시 전형 정보 연계 → 학생부교과/종합 가이드</a:t>
+            </a:r>
+          </a:p>
+          <a:p>
+            <a:pPr>
+              <a:spcAft>
+                <a:spcPts val="800"/>
+              </a:spcAft>
+            </a:pPr>
+          </a:p>
+          <a:p>
+            <a:pPr>
+              <a:spcBef>
+                <a:spcPts val="1200"/>
+              </a:spcBef>
+              <a:spcAft>
+                <a:spcPts val="300"/>
+              </a:spcAft>
+              <a:defRPr sz="1500" b="1">
+                <a:solidFill>
+                  <a:srgbClr val="1D4ED8"/>
+                </a:solidFill>
+              </a:defRPr>
+            </a:pPr>
+            <a:r>
+              <a:t>▶ 기능 고도화</a:t>
+            </a:r>
+          </a:p>
+          <a:p>
+            <a:pPr>
+              <a:spcAft>
+                <a:spcPts val="300"/>
               </a:spcAft>
               <a:defRPr sz="1300">
                 <a:solidFill>
@@ -4111,71 +4789,84 @@
                 </a:solidFill>
               </a:defRPr>
             </a:pPr>
-          </a:p>
-          <a:p>
-            <a:pPr>
-              <a:spcAft>
-                <a:spcPts val="400"/>
-              </a:spcAft>
-              <a:defRPr sz="1400" b="1">
-                <a:solidFill>
-                  <a:srgbClr val="2563EB"/>
-                </a:solidFill>
-              </a:defRPr>
-            </a:pPr>
-            <a:r>
-              <a:t>▶ 기능 고도화</a:t>
-            </a:r>
-          </a:p>
-          <a:p>
-            <a:pPr>
-              <a:spcAft>
-                <a:spcPts val="400"/>
-              </a:spcAft>
-              <a:defRPr sz="1200">
+            <a:r>
+              <a:t>  • 사용자 피드백 수집 → 추천 모델 지속 개선 (A/B 테스트)</a:t>
+            </a:r>
+          </a:p>
+          <a:p>
+            <a:pPr>
+              <a:spcAft>
+                <a:spcPts val="300"/>
+              </a:spcAft>
+              <a:defRPr sz="1300">
                 <a:solidFill>
                   <a:srgbClr val="1E293B"/>
                 </a:solidFill>
               </a:defRPr>
             </a:pPr>
             <a:r>
-              <a:t>  • 사용자 피드백 학습 → 추천 모델 지속 개선</a:t>
-            </a:r>
-          </a:p>
-          <a:p>
-            <a:pPr>
-              <a:spcAft>
-                <a:spcPts val="400"/>
-              </a:spcAft>
-              <a:defRPr sz="1200">
+              <a:t>  • 학부모/교사용 대시보드 → 교육 현장 활용도 제고</a:t>
+            </a:r>
+          </a:p>
+          <a:p>
+            <a:pPr>
+              <a:spcAft>
+                <a:spcPts val="300"/>
+              </a:spcAft>
+              <a:defRPr sz="1300">
                 <a:solidFill>
                   <a:srgbClr val="1E293B"/>
                 </a:solidFill>
               </a:defRPr>
             </a:pPr>
             <a:r>
-              <a:t>  • 모바일 앱 개발 → 접근성 확대</a:t>
-            </a:r>
-          </a:p>
-          <a:p>
-            <a:pPr>
-              <a:spcAft>
-                <a:spcPts val="400"/>
-              </a:spcAft>
-              <a:defRPr sz="1200">
+              <a:t>  • 모바일 반응형 → 스마트폰 접근성 확대</a:t>
+            </a:r>
+          </a:p>
+          <a:p>
+            <a:pPr>
+              <a:spcAft>
+                <a:spcPts val="800"/>
+              </a:spcAft>
+            </a:pPr>
+          </a:p>
+          <a:p>
+            <a:pPr>
+              <a:spcBef>
+                <a:spcPts val="1200"/>
+              </a:spcBef>
+              <a:spcAft>
+                <a:spcPts val="300"/>
+              </a:spcAft>
+              <a:defRPr sz="1500" b="1">
+                <a:solidFill>
+                  <a:srgbClr val="1D4ED8"/>
+                </a:solidFill>
+              </a:defRPr>
+            </a:pPr>
+            <a:r>
+              <a:t>▶ 서비스 확장 로드맵</a:t>
+            </a:r>
+          </a:p>
+          <a:p>
+            <a:pPr>
+              <a:spcAft>
+                <a:spcPts val="300"/>
+              </a:spcAft>
+              <a:defRPr sz="1300">
                 <a:solidFill>
                   <a:srgbClr val="1E293B"/>
                 </a:solidFill>
               </a:defRPr>
             </a:pPr>
             <a:r>
-              <a:t>  • 학부모/교사용 대시보드 → 교육 현장 활용도 제고</a:t>
-            </a:r>
-          </a:p>
-          <a:p>
-            <a:pPr>
-              <a:spcAft>
-                <a:spcPts val="400"/>
+              <a:t>  • Phase 1 (현재): 중학생 → 고등학교 매칭</a:t>
+            </a:r>
+          </a:p>
+          <a:p>
+            <a:pPr>
+              <a:spcAft>
+                <a:spcPts val="300"/>
               </a:spcAft>
               <a:defRPr sz="1300">
                 <a:solidFill>
@@ -4183,65 +4874,23 @@
                 </a:solidFill>
               </a:defRPr>
             </a:pPr>
-          </a:p>
-          <a:p>
-            <a:pPr>
-              <a:spcAft>
-                <a:spcPts val="400"/>
-              </a:spcAft>
-              <a:defRPr sz="1400" b="1">
-                <a:solidFill>
-                  <a:srgbClr val="2563EB"/>
-                </a:solidFill>
-              </a:defRPr>
-            </a:pPr>
-            <a:r>
-              <a:t>▶ 서비스 확장</a:t>
-            </a:r>
-          </a:p>
-          <a:p>
-            <a:pPr>
-              <a:spcAft>
-                <a:spcPts val="400"/>
-              </a:spcAft>
-              <a:defRPr sz="1200">
+            <a:r>
+              <a:t>  • Phase 2: 고등학생 → 대학/학과 매칭</a:t>
+            </a:r>
+          </a:p>
+          <a:p>
+            <a:pPr>
+              <a:spcAft>
+                <a:spcPts val="300"/>
+              </a:spcAft>
+              <a:defRPr sz="1300">
                 <a:solidFill>
                   <a:srgbClr val="1E293B"/>
                 </a:solidFill>
               </a:defRPr>
             </a:pPr>
             <a:r>
-              <a:t>  • 중학생 → 고등학교 선택 (현재)</a:t>
-            </a:r>
-          </a:p>
-          <a:p>
-            <a:pPr>
-              <a:spcAft>
-                <a:spcPts val="400"/>
-              </a:spcAft>
-              <a:defRPr sz="1200">
-                <a:solidFill>
-                  <a:srgbClr val="1E293B"/>
-                </a:solidFill>
-              </a:defRPr>
-            </a:pPr>
-            <a:r>
-              <a:t>  • 고등학생 → 대학/학과 선택 (확장 예정)</a:t>
-            </a:r>
-          </a:p>
-          <a:p>
-            <a:pPr>
-              <a:spcAft>
-                <a:spcPts val="400"/>
-              </a:spcAft>
-              <a:defRPr sz="1200">
-                <a:solidFill>
-                  <a:srgbClr val="1E293B"/>
-                </a:solidFill>
-              </a:defRPr>
-            </a:pPr>
-            <a:r>
-              <a:t>  • 대학생 → 취업/진로 매칭 (장기 목표)</a:t>
+              <a:t>  • Phase 3: 대학생 → 취업/진로 매칭</a:t>
             </a:r>
           </a:p>
         </p:txBody>
@@ -4257,6 +4906,14 @@
 <file path=ppt/slides/slide15.xml><?xml version="1.0" encoding="utf-8"?>
 <p:sld xmlns:a="http://schemas.openxmlformats.org/drawingml/2006/main" xmlns:p="http://schemas.openxmlformats.org/presentationml/2006/main" xmlns:r="http://schemas.openxmlformats.org/officeDocument/2006/relationships">
   <p:cSld>
+    <p:bg>
+      <p:bgPr>
+        <a:solidFill>
+          <a:srgbClr val="FFFFFF"/>
+        </a:solidFill>
+        <a:effectLst/>
+      </p:bgPr>
+    </p:bg>
     <p:spTree>
       <p:nvGrpSpPr>
         <p:cNvPr id="1" name=""/>
@@ -4266,14 +4923,57 @@
       <p:grpSpPr/>
       <p:sp>
         <p:nvSpPr>
-          <p:cNvPr id="2" name="TextBox 1"/>
+          <p:cNvPr id="2" name="Rectangle 1"/>
+          <p:cNvSpPr/>
+          <p:nvPr/>
+        </p:nvSpPr>
+        <p:spPr>
+          <a:xfrm>
+            <a:off x="0" y="0"/>
+            <a:ext cx="288000" cy="6858000"/>
+          </a:xfrm>
+          <a:prstGeom prst="rect">
+            <a:avLst/>
+          </a:prstGeom>
+          <a:solidFill>
+            <a:srgbClr val="1D4ED8"/>
+          </a:solidFill>
+          <a:ln>
+            <a:noFill/>
+          </a:ln>
+        </p:spPr>
+        <p:style>
+          <a:lnRef idx="1">
+            <a:schemeClr val="accent1"/>
+          </a:lnRef>
+          <a:fillRef idx="3">
+            <a:schemeClr val="accent1"/>
+          </a:fillRef>
+          <a:effectRef idx="2">
+            <a:schemeClr val="accent1"/>
+          </a:effectRef>
+          <a:fontRef idx="minor">
+            <a:schemeClr val="lt1"/>
+          </a:fontRef>
+        </p:style>
+        <p:txBody>
+          <a:bodyPr rtlCol="0" anchor="ctr"/>
+          <a:lstStyle/>
+          <a:p>
+            <a:pPr algn="ctr"/>
+          </a:p>
+        </p:txBody>
+      </p:sp>
+      <p:sp>
+        <p:nvSpPr>
+          <p:cNvPr id="3" name="TextBox 2"/>
           <p:cNvSpPr txBox="1"/>
           <p:nvPr/>
         </p:nvSpPr>
         <p:spPr>
           <a:xfrm>
-            <a:off x="720000" y="360000"/>
-            <a:ext cx="9360000" cy="720000"/>
+            <a:off x="11160000" y="6300000"/>
+            <a:ext cx="720000" cy="360000"/>
           </a:xfrm>
           <a:prstGeom prst="rect">
             <a:avLst/>
@@ -4286,41 +4986,26 @@
           </a:bodyPr>
           <a:lstStyle/>
           <a:p>
-            <a:pPr>
-              <a:defRPr sz="2400" b="1">
-                <a:solidFill>
-                  <a:srgbClr val="1E293B"/>
-                </a:solidFill>
-              </a:defRPr>
-            </a:pPr>
-            <a:r>
-              <a:t>부록: 생성형 AI 활용 정보</a:t>
-            </a:r>
-          </a:p>
-          <a:p>
-            <a:pPr>
-              <a:defRPr sz="1300">
-                <a:solidFill>
-                  <a:srgbClr val="64748B"/>
-                </a:solidFill>
-              </a:defRPr>
-            </a:pPr>
-            <a:r>
-              <a:t>(대회 규정에 따라 생성형 AI 활용 사항을 기재합니다)</a:t>
-            </a:r>
-          </a:p>
-        </p:txBody>
-      </p:sp>
-      <p:sp>
-        <p:nvSpPr>
-          <p:cNvPr id="3" name="TextBox 2"/>
+            <a:pPr algn="r">
+              <a:defRPr sz="1000">
+                <a:solidFill>
+                  <a:srgbClr val="94A3B8"/>
+                </a:solidFill>
+              </a:defRPr>
+            </a:pPr>
+          </a:p>
+        </p:txBody>
+      </p:sp>
+      <p:sp>
+        <p:nvSpPr>
+          <p:cNvPr id="4" name="TextBox 3"/>
           <p:cNvSpPr txBox="1"/>
           <p:nvPr/>
         </p:nvSpPr>
         <p:spPr>
           <a:xfrm>
-            <a:off x="720000" y="1440000"/>
-            <a:ext cx="9360000" cy="5400000"/>
+            <a:off x="900000" y="360000"/>
+            <a:ext cx="10080000" cy="900000"/>
           </a:xfrm>
           <a:prstGeom prst="rect">
             <a:avLst/>
@@ -4328,6 +5013,84 @@
           <a:noFill/>
         </p:spPr>
         <p:txBody>
+          <a:bodyPr wrap="none">
+            <a:spAutoFit/>
+          </a:bodyPr>
+          <a:lstStyle/>
+          <a:p>
+            <a:pPr>
+              <a:defRPr sz="2600" b="1">
+                <a:solidFill>
+                  <a:srgbClr val="0F172A"/>
+                </a:solidFill>
+              </a:defRPr>
+            </a:pPr>
+            <a:r>
+              <a:t>부록: 생성형 AI 활용 정보</a:t>
+            </a:r>
+          </a:p>
+        </p:txBody>
+      </p:sp>
+      <p:sp>
+        <p:nvSpPr>
+          <p:cNvPr id="5" name="Rectangle 4"/>
+          <p:cNvSpPr/>
+          <p:nvPr/>
+        </p:nvSpPr>
+        <p:spPr>
+          <a:xfrm>
+            <a:off x="900000" y="1152000"/>
+            <a:ext cx="1440000" cy="36000"/>
+          </a:xfrm>
+          <a:prstGeom prst="rect">
+            <a:avLst/>
+          </a:prstGeom>
+          <a:solidFill>
+            <a:srgbClr val="3B82F6"/>
+          </a:solidFill>
+          <a:ln>
+            <a:noFill/>
+          </a:ln>
+        </p:spPr>
+        <p:style>
+          <a:lnRef idx="1">
+            <a:schemeClr val="accent1"/>
+          </a:lnRef>
+          <a:fillRef idx="3">
+            <a:schemeClr val="accent1"/>
+          </a:fillRef>
+          <a:effectRef idx="2">
+            <a:schemeClr val="accent1"/>
+          </a:effectRef>
+          <a:fontRef idx="minor">
+            <a:schemeClr val="lt1"/>
+          </a:fontRef>
+        </p:style>
+        <p:txBody>
+          <a:bodyPr rtlCol="0" anchor="ctr"/>
+          <a:lstStyle/>
+          <a:p>
+            <a:pPr algn="ctr"/>
+          </a:p>
+        </p:txBody>
+      </p:sp>
+      <p:sp>
+        <p:nvSpPr>
+          <p:cNvPr id="6" name="TextBox 5"/>
+          <p:cNvSpPr txBox="1"/>
+          <p:nvPr/>
+        </p:nvSpPr>
+        <p:spPr>
+          <a:xfrm>
+            <a:off x="900000" y="1440000"/>
+            <a:ext cx="10440000" cy="5040000"/>
+          </a:xfrm>
+          <a:prstGeom prst="rect">
+            <a:avLst/>
+          </a:prstGeom>
+          <a:noFill/>
+        </p:spPr>
+        <p:txBody>
           <a:bodyPr wrap="square">
             <a:spAutoFit/>
           </a:bodyPr>
@@ -4335,12 +5098,15 @@
           <a:p/>
           <a:p>
             <a:pPr>
-              <a:spcAft>
-                <a:spcPts val="400"/>
-              </a:spcAft>
-              <a:defRPr sz="1400" b="1">
-                <a:solidFill>
-                  <a:srgbClr val="2563EB"/>
+              <a:spcBef>
+                <a:spcPts val="1200"/>
+              </a:spcBef>
+              <a:spcAft>
+                <a:spcPts val="300"/>
+              </a:spcAft>
+              <a:defRPr sz="1500" b="1">
+                <a:solidFill>
+                  <a:srgbClr val="1D4ED8"/>
                 </a:solidFill>
               </a:defRPr>
             </a:pPr>
@@ -4351,22 +5117,47 @@
           <a:p>
             <a:pPr>
               <a:spcAft>
-                <a:spcPts val="400"/>
-              </a:spcAft>
-              <a:defRPr sz="1200">
+                <a:spcPts val="300"/>
+              </a:spcAft>
+              <a:defRPr sz="1300">
                 <a:solidFill>
                   <a:srgbClr val="1E293B"/>
                 </a:solidFill>
               </a:defRPr>
             </a:pPr>
             <a:r>
-              <a:t>  • Claude (Anthropic) - Kiro IDE 환경에서 활용</a:t>
-            </a:r>
-          </a:p>
-          <a:p>
-            <a:pPr>
-              <a:spcAft>
-                <a:spcPts val="400"/>
+              <a:t>  • Claude (Anthropic) — Kiro IDE 환경에서 대화형으로 활용</a:t>
+            </a:r>
+          </a:p>
+          <a:p>
+            <a:pPr>
+              <a:spcAft>
+                <a:spcPts val="800"/>
+              </a:spcAft>
+            </a:pPr>
+          </a:p>
+          <a:p>
+            <a:pPr>
+              <a:spcBef>
+                <a:spcPts val="1200"/>
+              </a:spcBef>
+              <a:spcAft>
+                <a:spcPts val="300"/>
+              </a:spcAft>
+              <a:defRPr sz="1500" b="1">
+                <a:solidFill>
+                  <a:srgbClr val="1D4ED8"/>
+                </a:solidFill>
+              </a:defRPr>
+            </a:pPr>
+            <a:r>
+              <a:t>▶ 활용 범위</a:t>
+            </a:r>
+          </a:p>
+          <a:p>
+            <a:pPr>
+              <a:spcAft>
+                <a:spcPts val="300"/>
               </a:spcAft>
               <a:defRPr sz="1300">
                 <a:solidFill>
@@ -4374,116 +5165,129 @@
                 </a:solidFill>
               </a:defRPr>
             </a:pPr>
-          </a:p>
-          <a:p>
-            <a:pPr>
-              <a:spcAft>
-                <a:spcPts val="400"/>
-              </a:spcAft>
-              <a:defRPr sz="1400" b="1">
-                <a:solidFill>
-                  <a:srgbClr val="2563EB"/>
-                </a:solidFill>
-              </a:defRPr>
-            </a:pPr>
-            <a:r>
-              <a:t>▶ 활용 내용</a:t>
-            </a:r>
-          </a:p>
-          <a:p>
-            <a:pPr>
-              <a:spcAft>
-                <a:spcPts val="400"/>
-              </a:spcAft>
-              <a:defRPr sz="1200">
+            <a:r>
+              <a:t>  • 프로젝트 기획 및 아키텍처 설계 지원</a:t>
+            </a:r>
+          </a:p>
+          <a:p>
+            <a:pPr>
+              <a:spcAft>
+                <a:spcPts val="300"/>
+              </a:spcAft>
+              <a:defRPr sz="1300">
                 <a:solidFill>
                   <a:srgbClr val="1E293B"/>
                 </a:solidFill>
               </a:defRPr>
             </a:pPr>
             <a:r>
-              <a:t>  • 프로젝트 기획 및 구조 설계 지원</a:t>
-            </a:r>
-          </a:p>
-          <a:p>
-            <a:pPr>
-              <a:spcAft>
-                <a:spcPts val="400"/>
-              </a:spcAft>
-              <a:defRPr sz="1200">
+              <a:t>  • 공공데이터 API 수집 스크립트 작성 (Python)</a:t>
+            </a:r>
+          </a:p>
+          <a:p>
+            <a:pPr>
+              <a:spcAft>
+                <a:spcPts val="300"/>
+              </a:spcAft>
+              <a:defRPr sz="1300">
                 <a:solidFill>
                   <a:srgbClr val="1E293B"/>
                 </a:solidFill>
               </a:defRPr>
             </a:pPr>
             <a:r>
-              <a:t>  • 공공데이터 API 수집 스크립트 작성</a:t>
-            </a:r>
-          </a:p>
-          <a:p>
-            <a:pPr>
-              <a:spcAft>
-                <a:spcPts val="400"/>
-              </a:spcAft>
-              <a:defRPr sz="1200">
+              <a:t>  • Holland/MBTI 매핑 알고리즘 설계 및 구현</a:t>
+            </a:r>
+          </a:p>
+          <a:p>
+            <a:pPr>
+              <a:spcAft>
+                <a:spcPts val="300"/>
+              </a:spcAft>
+              <a:defRPr sz="1300">
                 <a:solidFill>
                   <a:srgbClr val="1E293B"/>
                 </a:solidFill>
               </a:defRPr>
             </a:pPr>
             <a:r>
-              <a:t>  • Holland/MBTI 매핑 알고리즘 설계 및 구현</a:t>
-            </a:r>
-          </a:p>
-          <a:p>
-            <a:pPr>
-              <a:spcAft>
-                <a:spcPts val="400"/>
-              </a:spcAft>
-              <a:defRPr sz="1200">
+              <a:t>  • Frontend(React) / Backend(FastAPI) 코드 작성</a:t>
+            </a:r>
+          </a:p>
+          <a:p>
+            <a:pPr>
+              <a:spcAft>
+                <a:spcPts val="300"/>
+              </a:spcAft>
+              <a:defRPr sz="1300">
                 <a:solidFill>
                   <a:srgbClr val="1E293B"/>
                 </a:solidFill>
               </a:defRPr>
             </a:pPr>
             <a:r>
-              <a:t>  • Frontend/Backend 코드 작성</a:t>
-            </a:r>
-          </a:p>
-          <a:p>
-            <a:pPr>
-              <a:spcAft>
-                <a:spcPts val="400"/>
-              </a:spcAft>
-              <a:defRPr sz="1200">
+              <a:t>  • EDA 시각화 스크립트 작성</a:t>
+            </a:r>
+          </a:p>
+          <a:p>
+            <a:pPr>
+              <a:spcAft>
+                <a:spcPts val="300"/>
+              </a:spcAft>
+              <a:defRPr sz="1300">
                 <a:solidFill>
                   <a:srgbClr val="1E293B"/>
                 </a:solidFill>
               </a:defRPr>
             </a:pPr>
             <a:r>
-              <a:t>  • EDA 시각화 스크립트 작성</a:t>
-            </a:r>
-          </a:p>
-          <a:p>
-            <a:pPr>
-              <a:spcAft>
-                <a:spcPts val="400"/>
-              </a:spcAft>
-              <a:defRPr sz="1200">
+              <a:t>  • 보고서 및 발표자료 초안 작성</a:t>
+            </a:r>
+          </a:p>
+          <a:p>
+            <a:pPr>
+              <a:spcAft>
+                <a:spcPts val="800"/>
+              </a:spcAft>
+            </a:pPr>
+          </a:p>
+          <a:p>
+            <a:pPr>
+              <a:spcBef>
+                <a:spcPts val="1200"/>
+              </a:spcBef>
+              <a:spcAft>
+                <a:spcPts val="300"/>
+              </a:spcAft>
+              <a:defRPr sz="1500" b="1">
+                <a:solidFill>
+                  <a:srgbClr val="1D4ED8"/>
+                </a:solidFill>
+              </a:defRPr>
+            </a:pPr>
+            <a:r>
+              <a:t>▶ 산출물</a:t>
+            </a:r>
+          </a:p>
+          <a:p>
+            <a:pPr>
+              <a:spcAft>
+                <a:spcPts val="300"/>
+              </a:spcAft>
+              <a:defRPr sz="1300">
                 <a:solidFill>
                   <a:srgbClr val="1E293B"/>
                 </a:solidFill>
               </a:defRPr>
             </a:pPr>
             <a:r>
-              <a:t>  • 보고서 및 발표자료 초안 작성</a:t>
-            </a:r>
-          </a:p>
-          <a:p>
-            <a:pPr>
-              <a:spcAft>
-                <a:spcPts val="400"/>
+              <a:t>  • 전체 소스코드: https://github.com/soobeen0822/nachimban</a:t>
+            </a:r>
+          </a:p>
+          <a:p>
+            <a:pPr>
+              <a:spcAft>
+                <a:spcPts val="300"/>
               </a:spcAft>
               <a:defRPr sz="1300">
                 <a:solidFill>
@@ -4491,50 +5295,23 @@
                 </a:solidFill>
               </a:defRPr>
             </a:pPr>
-          </a:p>
-          <a:p>
-            <a:pPr>
-              <a:spcAft>
-                <a:spcPts val="400"/>
-              </a:spcAft>
-              <a:defRPr sz="1400" b="1">
-                <a:solidFill>
-                  <a:srgbClr val="2563EB"/>
-                </a:solidFill>
-              </a:defRPr>
-            </a:pPr>
-            <a:r>
-              <a:t>▶ 추가 산출물</a:t>
-            </a:r>
-          </a:p>
-          <a:p>
-            <a:pPr>
-              <a:spcAft>
-                <a:spcPts val="400"/>
-              </a:spcAft>
-              <a:defRPr sz="1200">
+            <a:r>
+              <a:t>  • 라이브 서비스: https://nachimban-nine.vercel.app</a:t>
+            </a:r>
+          </a:p>
+          <a:p>
+            <a:pPr>
+              <a:spcAft>
+                <a:spcPts val="300"/>
+              </a:spcAft>
+              <a:defRPr sz="1300">
                 <a:solidFill>
                   <a:srgbClr val="1E293B"/>
                 </a:solidFill>
               </a:defRPr>
             </a:pPr>
             <a:r>
-              <a:t>  • 전체 소스코드: https://github.com/soobeen0822/nachimban</a:t>
-            </a:r>
-          </a:p>
-          <a:p>
-            <a:pPr>
-              <a:spcAft>
-                <a:spcPts val="400"/>
-              </a:spcAft>
-              <a:defRPr sz="1200">
-                <a:solidFill>
-                  <a:srgbClr val="1E293B"/>
-                </a:solidFill>
-              </a:defRPr>
-            </a:pPr>
-            <a:r>
-              <a:t>  • 라이브 서비스: https://nachimban-nine.vercel.app</a:t>
+              <a:t>  • API 서버: https://nachimban-api.onrender.com</a:t>
             </a:r>
           </a:p>
         </p:txBody>
@@ -4550,6 +5327,14 @@
 <file path=ppt/slides/slide2.xml><?xml version="1.0" encoding="utf-8"?>
 <p:sld xmlns:a="http://schemas.openxmlformats.org/drawingml/2006/main" xmlns:p="http://schemas.openxmlformats.org/presentationml/2006/main" xmlns:r="http://schemas.openxmlformats.org/officeDocument/2006/relationships">
   <p:cSld>
+    <p:bg>
+      <p:bgPr>
+        <a:solidFill>
+          <a:srgbClr val="FFFFFF"/>
+        </a:solidFill>
+        <a:effectLst/>
+      </p:bgPr>
+    </p:bg>
     <p:spTree>
       <p:nvGrpSpPr>
         <p:cNvPr id="1" name=""/>
@@ -4559,14 +5344,57 @@
       <p:grpSpPr/>
       <p:sp>
         <p:nvSpPr>
-          <p:cNvPr id="2" name="TextBox 1"/>
+          <p:cNvPr id="2" name="Rectangle 1"/>
+          <p:cNvSpPr/>
+          <p:nvPr/>
+        </p:nvSpPr>
+        <p:spPr>
+          <a:xfrm>
+            <a:off x="0" y="0"/>
+            <a:ext cx="288000" cy="6858000"/>
+          </a:xfrm>
+          <a:prstGeom prst="rect">
+            <a:avLst/>
+          </a:prstGeom>
+          <a:solidFill>
+            <a:srgbClr val="1D4ED8"/>
+          </a:solidFill>
+          <a:ln>
+            <a:noFill/>
+          </a:ln>
+        </p:spPr>
+        <p:style>
+          <a:lnRef idx="1">
+            <a:schemeClr val="accent1"/>
+          </a:lnRef>
+          <a:fillRef idx="3">
+            <a:schemeClr val="accent1"/>
+          </a:fillRef>
+          <a:effectRef idx="2">
+            <a:schemeClr val="accent1"/>
+          </a:effectRef>
+          <a:fontRef idx="minor">
+            <a:schemeClr val="lt1"/>
+          </a:fontRef>
+        </p:style>
+        <p:txBody>
+          <a:bodyPr rtlCol="0" anchor="ctr"/>
+          <a:lstStyle/>
+          <a:p>
+            <a:pPr algn="ctr"/>
+          </a:p>
+        </p:txBody>
+      </p:sp>
+      <p:sp>
+        <p:nvSpPr>
+          <p:cNvPr id="3" name="TextBox 2"/>
           <p:cNvSpPr txBox="1"/>
           <p:nvPr/>
         </p:nvSpPr>
         <p:spPr>
           <a:xfrm>
-            <a:off x="720000" y="360000"/>
-            <a:ext cx="9360000" cy="720000"/>
+            <a:off x="11160000" y="6300000"/>
+            <a:ext cx="720000" cy="360000"/>
           </a:xfrm>
           <a:prstGeom prst="rect">
             <a:avLst/>
@@ -4579,29 +5407,29 @@
           </a:bodyPr>
           <a:lstStyle/>
           <a:p>
-            <a:pPr>
-              <a:defRPr sz="2400" b="1">
-                <a:solidFill>
-                  <a:srgbClr val="1E293B"/>
-                </a:solidFill>
-              </a:defRPr>
-            </a:pPr>
-            <a:r>
-              <a:t>활용 교육 공공데이터</a:t>
-            </a:r>
-          </a:p>
-        </p:txBody>
-      </p:sp>
-      <p:sp>
-        <p:nvSpPr>
-          <p:cNvPr id="3" name="TextBox 2"/>
+            <a:pPr algn="r">
+              <a:defRPr sz="1000">
+                <a:solidFill>
+                  <a:srgbClr val="94A3B8"/>
+                </a:solidFill>
+              </a:defRPr>
+            </a:pPr>
+            <a:r>
+              <a:t>1</a:t>
+            </a:r>
+          </a:p>
+        </p:txBody>
+      </p:sp>
+      <p:sp>
+        <p:nvSpPr>
+          <p:cNvPr id="4" name="TextBox 3"/>
           <p:cNvSpPr txBox="1"/>
           <p:nvPr/>
         </p:nvSpPr>
         <p:spPr>
           <a:xfrm>
-            <a:off x="720000" y="1260000"/>
-            <a:ext cx="9360000" cy="5400000"/>
+            <a:off x="900000" y="360000"/>
+            <a:ext cx="10080000" cy="900000"/>
           </a:xfrm>
           <a:prstGeom prst="rect">
             <a:avLst/>
@@ -4609,6 +5437,84 @@
           <a:noFill/>
         </p:spPr>
         <p:txBody>
+          <a:bodyPr wrap="none">
+            <a:spAutoFit/>
+          </a:bodyPr>
+          <a:lstStyle/>
+          <a:p>
+            <a:pPr>
+              <a:defRPr sz="2600" b="1">
+                <a:solidFill>
+                  <a:srgbClr val="0F172A"/>
+                </a:solidFill>
+              </a:defRPr>
+            </a:pPr>
+            <a:r>
+              <a:t>활용 교육 공공데이터</a:t>
+            </a:r>
+          </a:p>
+        </p:txBody>
+      </p:sp>
+      <p:sp>
+        <p:nvSpPr>
+          <p:cNvPr id="5" name="Rectangle 4"/>
+          <p:cNvSpPr/>
+          <p:nvPr/>
+        </p:nvSpPr>
+        <p:spPr>
+          <a:xfrm>
+            <a:off x="900000" y="1152000"/>
+            <a:ext cx="1440000" cy="36000"/>
+          </a:xfrm>
+          <a:prstGeom prst="rect">
+            <a:avLst/>
+          </a:prstGeom>
+          <a:solidFill>
+            <a:srgbClr val="3B82F6"/>
+          </a:solidFill>
+          <a:ln>
+            <a:noFill/>
+          </a:ln>
+        </p:spPr>
+        <p:style>
+          <a:lnRef idx="1">
+            <a:schemeClr val="accent1"/>
+          </a:lnRef>
+          <a:fillRef idx="3">
+            <a:schemeClr val="accent1"/>
+          </a:fillRef>
+          <a:effectRef idx="2">
+            <a:schemeClr val="accent1"/>
+          </a:effectRef>
+          <a:fontRef idx="minor">
+            <a:schemeClr val="lt1"/>
+          </a:fontRef>
+        </p:style>
+        <p:txBody>
+          <a:bodyPr rtlCol="0" anchor="ctr"/>
+          <a:lstStyle/>
+          <a:p>
+            <a:pPr algn="ctr"/>
+          </a:p>
+        </p:txBody>
+      </p:sp>
+      <p:sp>
+        <p:nvSpPr>
+          <p:cNvPr id="6" name="TextBox 5"/>
+          <p:cNvSpPr txBox="1"/>
+          <p:nvPr/>
+        </p:nvSpPr>
+        <p:spPr>
+          <a:xfrm>
+            <a:off x="900000" y="1440000"/>
+            <a:ext cx="10440000" cy="5040000"/>
+          </a:xfrm>
+          <a:prstGeom prst="rect">
+            <a:avLst/>
+          </a:prstGeom>
+          <a:noFill/>
+        </p:spPr>
+        <p:txBody>
           <a:bodyPr wrap="square">
             <a:spAutoFit/>
           </a:bodyPr>
@@ -4616,9 +5522,15 @@
           <a:p/>
           <a:p>
             <a:pPr>
+              <a:spcBef>
+                <a:spcPts val="800"/>
+              </a:spcBef>
+              <a:spcAft>
+                <a:spcPts val="300"/>
+              </a:spcAft>
               <a:defRPr sz="1400" b="1">
                 <a:solidFill>
-                  <a:srgbClr val="2563EB"/>
+                  <a:srgbClr val="0F172A"/>
                 </a:solidFill>
               </a:defRPr>
             </a:pPr>
@@ -4628,54 +5540,82 @@
           </a:p>
           <a:p>
             <a:pPr>
-              <a:defRPr sz="1200">
+              <a:spcAft>
+                <a:spcPts val="300"/>
+              </a:spcAft>
+              <a:defRPr sz="1300">
                 <a:solidFill>
                   <a:srgbClr val="1E293B"/>
                 </a:solidFill>
               </a:defRPr>
             </a:pPr>
             <a:r>
-              <a:t>• 출처: 나이스(NEIS) 교육정보 개방 포털 (https://open.neis.go.kr)</a:t>
-            </a:r>
-          </a:p>
-          <a:p>
-            <a:pPr>
-              <a:defRPr sz="1200">
+              <a:t>  • 출처: 나이스(NEIS) 교육정보 개방 포털</a:t>
+            </a:r>
+          </a:p>
+          <a:p>
+            <a:pPr>
+              <a:spcAft>
+                <a:spcPts val="300"/>
+              </a:spcAft>
+              <a:defRPr sz="1300">
                 <a:solidFill>
                   <a:srgbClr val="1E293B"/>
                 </a:solidFill>
               </a:defRPr>
             </a:pPr>
             <a:r>
-              <a:t>• API: schoolInfo | 라이선스: 공공누리 제1유형</a:t>
-            </a:r>
-          </a:p>
-          <a:p>
-            <a:pPr>
-              <a:defRPr sz="1200">
+              <a:t>  • URL: https://open.neis.go.kr/hub/schoolInfo</a:t>
+            </a:r>
+          </a:p>
+          <a:p>
+            <a:pPr>
+              <a:spcAft>
+                <a:spcPts val="300"/>
+              </a:spcAft>
+              <a:defRPr sz="1300">
                 <a:solidFill>
                   <a:srgbClr val="1E293B"/>
                 </a:solidFill>
               </a:defRPr>
             </a:pPr>
             <a:r>
-              <a:t>• 내용: 학교명, 유형(일반고/특목고/특성화고), 주소, 홈페이지, 설립구분, 남녀공학구분</a:t>
-            </a:r>
-          </a:p>
-          <a:p>
-            <a:pPr>
-              <a:defRPr sz="1200">
+              <a:t>  • 라이선스: 공공누리 제1유형 (출처표시)</a:t>
+            </a:r>
+          </a:p>
+          <a:p>
+            <a:pPr>
+              <a:spcAft>
+                <a:spcPts val="300"/>
+              </a:spcAft>
+              <a:defRPr sz="1300">
                 <a:solidFill>
                   <a:srgbClr val="1E293B"/>
                 </a:solidFill>
               </a:defRPr>
             </a:pPr>
-          </a:p>
-          <a:p>
-            <a:pPr>
+            <a:r>
+              <a:t>  • 내용: 학교명, 유형, 주소, 홈페이지, 설립구분, 남녀공학구분</a:t>
+            </a:r>
+          </a:p>
+          <a:p>
+            <a:pPr>
+              <a:spcAft>
+                <a:spcPts val="800"/>
+              </a:spcAft>
+            </a:pPr>
+          </a:p>
+          <a:p>
+            <a:pPr>
+              <a:spcBef>
+                <a:spcPts val="800"/>
+              </a:spcBef>
+              <a:spcAft>
+                <a:spcPts val="300"/>
+              </a:spcAft>
               <a:defRPr sz="1400" b="1">
                 <a:solidFill>
-                  <a:srgbClr val="2563EB"/>
+                  <a:srgbClr val="0F172A"/>
                 </a:solidFill>
               </a:defRPr>
             </a:pPr>
@@ -4685,95 +5625,147 @@
           </a:p>
           <a:p>
             <a:pPr>
-              <a:defRPr sz="1200">
+              <a:spcAft>
+                <a:spcPts val="300"/>
+              </a:spcAft>
+              <a:defRPr sz="1300">
                 <a:solidFill>
                   <a:srgbClr val="1E293B"/>
                 </a:solidFill>
               </a:defRPr>
             </a:pPr>
             <a:r>
-              <a:t>• 출처: 나이스(NEIS) 교육정보 개방 포털 (https://open.neis.go.kr)</a:t>
-            </a:r>
-          </a:p>
-          <a:p>
-            <a:pPr>
-              <a:defRPr sz="1200">
+              <a:t>  • 출처: 나이스(NEIS) 교육정보 개방 포털</a:t>
+            </a:r>
+          </a:p>
+          <a:p>
+            <a:pPr>
+              <a:spcAft>
+                <a:spcPts val="300"/>
+              </a:spcAft>
+              <a:defRPr sz="1300">
                 <a:solidFill>
                   <a:srgbClr val="1E293B"/>
                 </a:solidFill>
               </a:defRPr>
             </a:pPr>
             <a:r>
-              <a:t>• API: hisTimetable | 라이선스: 공공누리 제1유형</a:t>
-            </a:r>
-          </a:p>
-          <a:p>
-            <a:pPr>
-              <a:defRPr sz="1200">
+              <a:t>  • URL: https://open.neis.go.kr/hub/hisTimetable</a:t>
+            </a:r>
+          </a:p>
+          <a:p>
+            <a:pPr>
+              <a:spcAft>
+                <a:spcPts val="300"/>
+              </a:spcAft>
+              <a:defRPr sz="1300">
                 <a:solidFill>
                   <a:srgbClr val="1E293B"/>
                 </a:solidFill>
               </a:defRPr>
             </a:pPr>
             <a:r>
-              <a:t>• 내용: 학교별 실제 개설 교과목명 (2025년 4월 기준)</a:t>
-            </a:r>
-          </a:p>
-          <a:p>
-            <a:pPr>
-              <a:defRPr sz="1200">
+              <a:t>  • 라이선스: 공공누리 제1유형 (출처표시)</a:t>
+            </a:r>
+          </a:p>
+          <a:p>
+            <a:pPr>
+              <a:spcAft>
+                <a:spcPts val="300"/>
+              </a:spcAft>
+              <a:defRPr sz="1300">
                 <a:solidFill>
                   <a:srgbClr val="1E293B"/>
                 </a:solidFill>
               </a:defRPr>
             </a:pPr>
-          </a:p>
-          <a:p>
-            <a:pPr>
+            <a:r>
+              <a:t>  • 내용: 학교별 실제 개설 교과목명 (2025년 4월 기준 시간표)</a:t>
+            </a:r>
+          </a:p>
+          <a:p>
+            <a:pPr>
+              <a:spcAft>
+                <a:spcPts val="800"/>
+              </a:spcAft>
+            </a:pPr>
+          </a:p>
+          <a:p>
+            <a:pPr>
+              <a:spcBef>
+                <a:spcPts val="800"/>
+              </a:spcBef>
+              <a:spcAft>
+                <a:spcPts val="300"/>
+              </a:spcAft>
               <a:defRPr sz="1400" b="1">
                 <a:solidFill>
-                  <a:srgbClr val="2563EB"/>
-                </a:solidFill>
-              </a:defRPr>
-            </a:pPr>
-            <a:r>
-              <a:t>■ 데이터 3: 직업 상세정보 및 능력/지식 점수 (462개 직업)</a:t>
-            </a:r>
-          </a:p>
-          <a:p>
-            <a:pPr>
-              <a:defRPr sz="1200">
+                  <a:srgbClr val="0F172A"/>
+                </a:solidFill>
+              </a:defRPr>
+            </a:pPr>
+            <a:r>
+              <a:t>■ 데이터 3: 직업 상세정보 + 능력/지식 점수 (462개 직업)</a:t>
+            </a:r>
+          </a:p>
+          <a:p>
+            <a:pPr>
+              <a:spcAft>
+                <a:spcPts val="300"/>
+              </a:spcAft>
+              <a:defRPr sz="1300">
                 <a:solidFill>
                   <a:srgbClr val="1E293B"/>
                 </a:solidFill>
               </a:defRPr>
             </a:pPr>
             <a:r>
-              <a:t>• 출처: 워크넷 work24 OpenAPI (https://www.work24.go.kr)</a:t>
-            </a:r>
-          </a:p>
-          <a:p>
-            <a:pPr>
-              <a:defRPr sz="1200">
+              <a:t>  • 출처: 워크넷 work24 OpenAPI</a:t>
+            </a:r>
+          </a:p>
+          <a:p>
+            <a:pPr>
+              <a:spcAft>
+                <a:spcPts val="300"/>
+              </a:spcAft>
+              <a:defRPr sz="1300">
                 <a:solidFill>
                   <a:srgbClr val="1E293B"/>
                 </a:solidFill>
               </a:defRPr>
             </a:pPr>
             <a:r>
-              <a:t>• API: callOpenApiSvcInfo212L01 | 라이선스: 공공누리 제1유형</a:t>
-            </a:r>
-          </a:p>
-          <a:p>
-            <a:pPr>
-              <a:defRPr sz="1200">
+              <a:t>  • URL: https://www.work24.go.kr/cm/openApi/call/wk/callOpenApiSvcInfo212L01.do</a:t>
+            </a:r>
+          </a:p>
+          <a:p>
+            <a:pPr>
+              <a:spcAft>
+                <a:spcPts val="300"/>
+              </a:spcAft>
+              <a:defRPr sz="1300">
                 <a:solidFill>
                   <a:srgbClr val="1E293B"/>
                 </a:solidFill>
               </a:defRPr>
             </a:pPr>
             <a:r>
-              <a:t>• 내용: 직업명, 직업개요, 임금, 전망, 필요 능력 35개 항목 점수, 필요 지식 30개 항목 점수</a:t>
+              <a:t>  • 라이선스: 공공누리 제1유형 (출처표시)</a:t>
+            </a:r>
+          </a:p>
+          <a:p>
+            <a:pPr>
+              <a:spcAft>
+                <a:spcPts val="300"/>
+              </a:spcAft>
+              <a:defRPr sz="1300">
+                <a:solidFill>
+                  <a:srgbClr val="1E293B"/>
+                </a:solidFill>
+              </a:defRPr>
+            </a:pPr>
+            <a:r>
+              <a:t>  • 내용: 직업명, 개요, 임금, 전망, 능력 35개 + 지식 30개 항목 점수</a:t>
             </a:r>
           </a:p>
         </p:txBody>
@@ -4789,6 +5781,14 @@
 <file path=ppt/slides/slide3.xml><?xml version="1.0" encoding="utf-8"?>
 <p:sld xmlns:a="http://schemas.openxmlformats.org/drawingml/2006/main" xmlns:p="http://schemas.openxmlformats.org/presentationml/2006/main" xmlns:r="http://schemas.openxmlformats.org/officeDocument/2006/relationships">
   <p:cSld>
+    <p:bg>
+      <p:bgPr>
+        <a:solidFill>
+          <a:srgbClr val="FFFFFF"/>
+        </a:solidFill>
+        <a:effectLst/>
+      </p:bgPr>
+    </p:bg>
     <p:spTree>
       <p:nvGrpSpPr>
         <p:cNvPr id="1" name=""/>
@@ -4798,14 +5798,57 @@
       <p:grpSpPr/>
       <p:sp>
         <p:nvSpPr>
-          <p:cNvPr id="2" name="TextBox 1"/>
+          <p:cNvPr id="2" name="Rectangle 1"/>
+          <p:cNvSpPr/>
+          <p:nvPr/>
+        </p:nvSpPr>
+        <p:spPr>
+          <a:xfrm>
+            <a:off x="0" y="0"/>
+            <a:ext cx="288000" cy="6858000"/>
+          </a:xfrm>
+          <a:prstGeom prst="rect">
+            <a:avLst/>
+          </a:prstGeom>
+          <a:solidFill>
+            <a:srgbClr val="1D4ED8"/>
+          </a:solidFill>
+          <a:ln>
+            <a:noFill/>
+          </a:ln>
+        </p:spPr>
+        <p:style>
+          <a:lnRef idx="1">
+            <a:schemeClr val="accent1"/>
+          </a:lnRef>
+          <a:fillRef idx="3">
+            <a:schemeClr val="accent1"/>
+          </a:fillRef>
+          <a:effectRef idx="2">
+            <a:schemeClr val="accent1"/>
+          </a:effectRef>
+          <a:fontRef idx="minor">
+            <a:schemeClr val="lt1"/>
+          </a:fontRef>
+        </p:style>
+        <p:txBody>
+          <a:bodyPr rtlCol="0" anchor="ctr"/>
+          <a:lstStyle/>
+          <a:p>
+            <a:pPr algn="ctr"/>
+          </a:p>
+        </p:txBody>
+      </p:sp>
+      <p:sp>
+        <p:nvSpPr>
+          <p:cNvPr id="3" name="TextBox 2"/>
           <p:cNvSpPr txBox="1"/>
           <p:nvPr/>
         </p:nvSpPr>
         <p:spPr>
           <a:xfrm>
-            <a:off x="720000" y="360000"/>
-            <a:ext cx="9360000" cy="720000"/>
+            <a:off x="11160000" y="6300000"/>
+            <a:ext cx="720000" cy="360000"/>
           </a:xfrm>
           <a:prstGeom prst="rect">
             <a:avLst/>
@@ -4818,29 +5861,29 @@
           </a:bodyPr>
           <a:lstStyle/>
           <a:p>
-            <a:pPr>
-              <a:defRPr sz="2400" b="1">
-                <a:solidFill>
-                  <a:srgbClr val="1E293B"/>
-                </a:solidFill>
-              </a:defRPr>
-            </a:pPr>
-            <a:r>
-              <a:t>1. 문제 정의</a:t>
-            </a:r>
-          </a:p>
-        </p:txBody>
-      </p:sp>
-      <p:sp>
-        <p:nvSpPr>
-          <p:cNvPr id="3" name="TextBox 2"/>
+            <a:pPr algn="r">
+              <a:defRPr sz="1000">
+                <a:solidFill>
+                  <a:srgbClr val="94A3B8"/>
+                </a:solidFill>
+              </a:defRPr>
+            </a:pPr>
+            <a:r>
+              <a:t>2</a:t>
+            </a:r>
+          </a:p>
+        </p:txBody>
+      </p:sp>
+      <p:sp>
+        <p:nvSpPr>
+          <p:cNvPr id="4" name="TextBox 3"/>
           <p:cNvSpPr txBox="1"/>
           <p:nvPr/>
         </p:nvSpPr>
         <p:spPr>
           <a:xfrm>
-            <a:off x="720000" y="1440000"/>
-            <a:ext cx="9360000" cy="5400000"/>
+            <a:off x="900000" y="360000"/>
+            <a:ext cx="10080000" cy="900000"/>
           </a:xfrm>
           <a:prstGeom prst="rect">
             <a:avLst/>
@@ -4848,6 +5891,84 @@
           <a:noFill/>
         </p:spPr>
         <p:txBody>
+          <a:bodyPr wrap="none">
+            <a:spAutoFit/>
+          </a:bodyPr>
+          <a:lstStyle/>
+          <a:p>
+            <a:pPr>
+              <a:defRPr sz="2600" b="1">
+                <a:solidFill>
+                  <a:srgbClr val="0F172A"/>
+                </a:solidFill>
+              </a:defRPr>
+            </a:pPr>
+            <a:r>
+              <a:t>문제 정의</a:t>
+            </a:r>
+          </a:p>
+        </p:txBody>
+      </p:sp>
+      <p:sp>
+        <p:nvSpPr>
+          <p:cNvPr id="5" name="Rectangle 4"/>
+          <p:cNvSpPr/>
+          <p:nvPr/>
+        </p:nvSpPr>
+        <p:spPr>
+          <a:xfrm>
+            <a:off x="900000" y="1152000"/>
+            <a:ext cx="1440000" cy="36000"/>
+          </a:xfrm>
+          <a:prstGeom prst="rect">
+            <a:avLst/>
+          </a:prstGeom>
+          <a:solidFill>
+            <a:srgbClr val="3B82F6"/>
+          </a:solidFill>
+          <a:ln>
+            <a:noFill/>
+          </a:ln>
+        </p:spPr>
+        <p:style>
+          <a:lnRef idx="1">
+            <a:schemeClr val="accent1"/>
+          </a:lnRef>
+          <a:fillRef idx="3">
+            <a:schemeClr val="accent1"/>
+          </a:fillRef>
+          <a:effectRef idx="2">
+            <a:schemeClr val="accent1"/>
+          </a:effectRef>
+          <a:fontRef idx="minor">
+            <a:schemeClr val="lt1"/>
+          </a:fontRef>
+        </p:style>
+        <p:txBody>
+          <a:bodyPr rtlCol="0" anchor="ctr"/>
+          <a:lstStyle/>
+          <a:p>
+            <a:pPr algn="ctr"/>
+          </a:p>
+        </p:txBody>
+      </p:sp>
+      <p:sp>
+        <p:nvSpPr>
+          <p:cNvPr id="6" name="TextBox 5"/>
+          <p:cNvSpPr txBox="1"/>
+          <p:nvPr/>
+        </p:nvSpPr>
+        <p:spPr>
+          <a:xfrm>
+            <a:off x="900000" y="1440000"/>
+            <a:ext cx="10440000" cy="5040000"/>
+          </a:xfrm>
+          <a:prstGeom prst="rect">
+            <a:avLst/>
+          </a:prstGeom>
+          <a:noFill/>
+        </p:spPr>
+        <p:txBody>
           <a:bodyPr wrap="square">
             <a:spAutoFit/>
           </a:bodyPr>
@@ -4855,12 +5976,15 @@
           <a:p/>
           <a:p>
             <a:pPr>
-              <a:spcAft>
-                <a:spcPts val="400"/>
-              </a:spcAft>
-              <a:defRPr sz="1400" b="1">
-                <a:solidFill>
-                  <a:srgbClr val="2563EB"/>
+              <a:spcBef>
+                <a:spcPts val="1200"/>
+              </a:spcBef>
+              <a:spcAft>
+                <a:spcPts val="300"/>
+              </a:spcAft>
+              <a:defRPr sz="1500" b="1">
+                <a:solidFill>
+                  <a:srgbClr val="1D4ED8"/>
                 </a:solidFill>
               </a:defRPr>
             </a:pPr>
@@ -4871,7 +5995,14 @@
           <a:p>
             <a:pPr>
               <a:spcAft>
-                <a:spcPts val="400"/>
+                <a:spcPts val="800"/>
+              </a:spcAft>
+            </a:pPr>
+          </a:p>
+          <a:p>
+            <a:pPr>
+              <a:spcAft>
+                <a:spcPts val="300"/>
               </a:spcAft>
               <a:defRPr sz="1300">
                 <a:solidFill>
@@ -4879,11 +6010,14 @@
                 </a:solidFill>
               </a:defRPr>
             </a:pPr>
-          </a:p>
-          <a:p>
-            <a:pPr>
-              <a:spcAft>
-                <a:spcPts val="400"/>
+            <a:r>
+              <a:t>  • 전국 2,407개 고등학교 정보가 여러 기관에 산재 → 통합 비교 불가</a:t>
+            </a:r>
+          </a:p>
+          <a:p>
+            <a:pPr>
+              <a:spcAft>
+                <a:spcPts val="300"/>
               </a:spcAft>
               <a:defRPr sz="1300">
                 <a:solidFill>
@@ -4892,13 +6026,13 @@
               </a:defRPr>
             </a:pPr>
             <a:r>
-              <a:t>• 전국 2,407개 고등학교 정보가 여러 기관에 산재 → 통합 비교 불가</a:t>
-            </a:r>
-          </a:p>
-          <a:p>
-            <a:pPr>
-              <a:spcAft>
-                <a:spcPts val="400"/>
+              <a:t>  • 기존 MBTI 검사: 16유형으로만 분류 → 경계값 학생의 개인차 미반영</a:t>
+            </a:r>
+          </a:p>
+          <a:p>
+            <a:pPr>
+              <a:spcAft>
+                <a:spcPts val="300"/>
               </a:spcAft>
               <a:defRPr sz="1300">
                 <a:solidFill>
@@ -4907,13 +6041,13 @@
               </a:defRPr>
             </a:pPr>
             <a:r>
-              <a:t>• 기존 MBTI: 16유형 분류로 경계값 학생 개인차 미반영</a:t>
-            </a:r>
-          </a:p>
-          <a:p>
-            <a:pPr>
-              <a:spcAft>
-                <a:spcPts val="400"/>
+              <a:t>  • 진로 선택이 데이터 기반이 아닌 주변 평판·막연한 인식에 의존</a:t>
+            </a:r>
+          </a:p>
+          <a:p>
+            <a:pPr>
+              <a:spcAft>
+                <a:spcPts val="300"/>
               </a:spcAft>
               <a:defRPr sz="1300">
                 <a:solidFill>
@@ -4922,13 +6056,45 @@
               </a:defRPr>
             </a:pPr>
             <a:r>
-              <a:t>• 진로 선택이 데이터가 아닌 주변 평판에 의존</a:t>
-            </a:r>
-          </a:p>
-          <a:p>
-            <a:pPr>
-              <a:spcAft>
-                <a:spcPts val="400"/>
+              <a:t>  • 진로상담 인프라 부족 지역(농어촌 등)의 정보 접근성 격차</a:t>
+            </a:r>
+          </a:p>
+          <a:p>
+            <a:pPr>
+              <a:spcAft>
+                <a:spcPts val="800"/>
+              </a:spcAft>
+            </a:pPr>
+          </a:p>
+          <a:p>
+            <a:pPr>
+              <a:spcBef>
+                <a:spcPts val="1200"/>
+              </a:spcBef>
+              <a:spcAft>
+                <a:spcPts val="300"/>
+              </a:spcAft>
+              <a:defRPr sz="1500" b="1">
+                <a:solidFill>
+                  <a:srgbClr val="1D4ED8"/>
+                </a:solidFill>
+              </a:defRPr>
+            </a:pPr>
+            <a:r>
+              <a:t>▶ 해결 목표</a:t>
+            </a:r>
+          </a:p>
+          <a:p>
+            <a:pPr>
+              <a:spcAft>
+                <a:spcPts val="800"/>
+              </a:spcAft>
+            </a:pPr>
+          </a:p>
+          <a:p>
+            <a:pPr>
+              <a:spcAft>
+                <a:spcPts val="300"/>
               </a:spcAft>
               <a:defRPr sz="1300">
                 <a:solidFill>
@@ -4937,13 +6103,13 @@
               </a:defRPr>
             </a:pPr>
             <a:r>
-              <a:t>• 진로상담 인프라 부족 지역의 교육 격차</a:t>
-            </a:r>
-          </a:p>
-          <a:p>
-            <a:pPr>
-              <a:spcAft>
-                <a:spcPts val="400"/>
+              <a:t>  • 교육 공공데이터를 AI로 통합 분석하여 맞춤형 진로 매칭 제공</a:t>
+            </a:r>
+          </a:p>
+          <a:p>
+            <a:pPr>
+              <a:spcAft>
+                <a:spcPts val="300"/>
               </a:spcAft>
               <a:defRPr sz="1300">
                 <a:solidFill>
@@ -4951,26 +6117,14 @@
                 </a:solidFill>
               </a:defRPr>
             </a:pPr>
-          </a:p>
-          <a:p>
-            <a:pPr>
-              <a:spcAft>
-                <a:spcPts val="400"/>
-              </a:spcAft>
-              <a:defRPr sz="1400" b="1">
-                <a:solidFill>
-                  <a:srgbClr val="2563EB"/>
-                </a:solidFill>
-              </a:defRPr>
-            </a:pPr>
-            <a:r>
-              <a:t>▶ 해결 목표</a:t>
-            </a:r>
-          </a:p>
-          <a:p>
-            <a:pPr>
-              <a:spcAft>
-                <a:spcPts val="400"/>
+            <a:r>
+              <a:t>  • MBTI 연속 스펙트럼(4축 0~100)으로 256가지+ 개인차 반영</a:t>
+            </a:r>
+          </a:p>
+          <a:p>
+            <a:pPr>
+              <a:spcAft>
+                <a:spcPts val="300"/>
               </a:spcAft>
               <a:defRPr sz="1300">
                 <a:solidFill>
@@ -4978,50 +6132,8 @@
                 </a:solidFill>
               </a:defRPr>
             </a:pPr>
-          </a:p>
-          <a:p>
-            <a:pPr>
-              <a:spcAft>
-                <a:spcPts val="400"/>
-              </a:spcAft>
-              <a:defRPr sz="1300">
-                <a:solidFill>
-                  <a:srgbClr val="1E293B"/>
-                </a:solidFill>
-              </a:defRPr>
-            </a:pPr>
-            <a:r>
-              <a:t>• 교육 공공데이터를 AI로 통합 분석</a:t>
-            </a:r>
-          </a:p>
-          <a:p>
-            <a:pPr>
-              <a:spcAft>
-                <a:spcPts val="400"/>
-              </a:spcAft>
-              <a:defRPr sz="1300">
-                <a:solidFill>
-                  <a:srgbClr val="1E293B"/>
-                </a:solidFill>
-              </a:defRPr>
-            </a:pPr>
-            <a:r>
-              <a:t>• 누구나 무료로 이용 가능한 맞춤형 진로 매칭 서비스 구현</a:t>
-            </a:r>
-          </a:p>
-          <a:p>
-            <a:pPr>
-              <a:spcAft>
-                <a:spcPts val="400"/>
-              </a:spcAft>
-              <a:defRPr sz="1300">
-                <a:solidFill>
-                  <a:srgbClr val="1E293B"/>
-                </a:solidFill>
-              </a:defRPr>
-            </a:pPr>
-            <a:r>
-              <a:t>• MBTI 연속 스펙트럼(256가지+)으로 정밀한 개인차 반영</a:t>
+            <a:r>
+              <a:t>  • 웹 기반 무료 서비스 → 지역·소득 무관 동등한 정보 접근</a:t>
             </a:r>
           </a:p>
         </p:txBody>
@@ -5037,6 +6149,14 @@
 <file path=ppt/slides/slide4.xml><?xml version="1.0" encoding="utf-8"?>
 <p:sld xmlns:a="http://schemas.openxmlformats.org/drawingml/2006/main" xmlns:p="http://schemas.openxmlformats.org/presentationml/2006/main" xmlns:r="http://schemas.openxmlformats.org/officeDocument/2006/relationships">
   <p:cSld>
+    <p:bg>
+      <p:bgPr>
+        <a:solidFill>
+          <a:srgbClr val="FFFFFF"/>
+        </a:solidFill>
+        <a:effectLst/>
+      </p:bgPr>
+    </p:bg>
     <p:spTree>
       <p:nvGrpSpPr>
         <p:cNvPr id="1" name=""/>
@@ -5046,14 +6166,57 @@
       <p:grpSpPr/>
       <p:sp>
         <p:nvSpPr>
-          <p:cNvPr id="2" name="TextBox 1"/>
+          <p:cNvPr id="2" name="Rectangle 1"/>
+          <p:cNvSpPr/>
+          <p:nvPr/>
+        </p:nvSpPr>
+        <p:spPr>
+          <a:xfrm>
+            <a:off x="0" y="0"/>
+            <a:ext cx="288000" cy="6858000"/>
+          </a:xfrm>
+          <a:prstGeom prst="rect">
+            <a:avLst/>
+          </a:prstGeom>
+          <a:solidFill>
+            <a:srgbClr val="1D4ED8"/>
+          </a:solidFill>
+          <a:ln>
+            <a:noFill/>
+          </a:ln>
+        </p:spPr>
+        <p:style>
+          <a:lnRef idx="1">
+            <a:schemeClr val="accent1"/>
+          </a:lnRef>
+          <a:fillRef idx="3">
+            <a:schemeClr val="accent1"/>
+          </a:fillRef>
+          <a:effectRef idx="2">
+            <a:schemeClr val="accent1"/>
+          </a:effectRef>
+          <a:fontRef idx="minor">
+            <a:schemeClr val="lt1"/>
+          </a:fontRef>
+        </p:style>
+        <p:txBody>
+          <a:bodyPr rtlCol="0" anchor="ctr"/>
+          <a:lstStyle/>
+          <a:p>
+            <a:pPr algn="ctr"/>
+          </a:p>
+        </p:txBody>
+      </p:sp>
+      <p:sp>
+        <p:nvSpPr>
+          <p:cNvPr id="3" name="TextBox 2"/>
           <p:cNvSpPr txBox="1"/>
           <p:nvPr/>
         </p:nvSpPr>
         <p:spPr>
           <a:xfrm>
-            <a:off x="720000" y="360000"/>
-            <a:ext cx="9360000" cy="720000"/>
+            <a:off x="11160000" y="6300000"/>
+            <a:ext cx="720000" cy="360000"/>
           </a:xfrm>
           <a:prstGeom prst="rect">
             <a:avLst/>
@@ -5066,29 +6229,29 @@
           </a:bodyPr>
           <a:lstStyle/>
           <a:p>
-            <a:pPr>
-              <a:defRPr sz="2400" b="1">
-                <a:solidFill>
-                  <a:srgbClr val="1E293B"/>
-                </a:solidFill>
-              </a:defRPr>
-            </a:pPr>
-            <a:r>
-              <a:t>2. 서비스 개요</a:t>
-            </a:r>
-          </a:p>
-        </p:txBody>
-      </p:sp>
-      <p:sp>
-        <p:nvSpPr>
-          <p:cNvPr id="3" name="TextBox 2"/>
+            <a:pPr algn="r">
+              <a:defRPr sz="1000">
+                <a:solidFill>
+                  <a:srgbClr val="94A3B8"/>
+                </a:solidFill>
+              </a:defRPr>
+            </a:pPr>
+            <a:r>
+              <a:t>3</a:t>
+            </a:r>
+          </a:p>
+        </p:txBody>
+      </p:sp>
+      <p:sp>
+        <p:nvSpPr>
+          <p:cNvPr id="4" name="TextBox 3"/>
           <p:cNvSpPr txBox="1"/>
           <p:nvPr/>
         </p:nvSpPr>
         <p:spPr>
           <a:xfrm>
-            <a:off x="720000" y="1440000"/>
-            <a:ext cx="9360000" cy="5400000"/>
+            <a:off x="900000" y="360000"/>
+            <a:ext cx="10080000" cy="900000"/>
           </a:xfrm>
           <a:prstGeom prst="rect">
             <a:avLst/>
@@ -5096,6 +6259,84 @@
           <a:noFill/>
         </p:spPr>
         <p:txBody>
+          <a:bodyPr wrap="none">
+            <a:spAutoFit/>
+          </a:bodyPr>
+          <a:lstStyle/>
+          <a:p>
+            <a:pPr>
+              <a:defRPr sz="2600" b="1">
+                <a:solidFill>
+                  <a:srgbClr val="0F172A"/>
+                </a:solidFill>
+              </a:defRPr>
+            </a:pPr>
+            <a:r>
+              <a:t>서비스 개요: 나침반(NACHIMBAN)</a:t>
+            </a:r>
+          </a:p>
+        </p:txBody>
+      </p:sp>
+      <p:sp>
+        <p:nvSpPr>
+          <p:cNvPr id="5" name="Rectangle 4"/>
+          <p:cNvSpPr/>
+          <p:nvPr/>
+        </p:nvSpPr>
+        <p:spPr>
+          <a:xfrm>
+            <a:off x="900000" y="1152000"/>
+            <a:ext cx="1440000" cy="36000"/>
+          </a:xfrm>
+          <a:prstGeom prst="rect">
+            <a:avLst/>
+          </a:prstGeom>
+          <a:solidFill>
+            <a:srgbClr val="3B82F6"/>
+          </a:solidFill>
+          <a:ln>
+            <a:noFill/>
+          </a:ln>
+        </p:spPr>
+        <p:style>
+          <a:lnRef idx="1">
+            <a:schemeClr val="accent1"/>
+          </a:lnRef>
+          <a:fillRef idx="3">
+            <a:schemeClr val="accent1"/>
+          </a:fillRef>
+          <a:effectRef idx="2">
+            <a:schemeClr val="accent1"/>
+          </a:effectRef>
+          <a:fontRef idx="minor">
+            <a:schemeClr val="lt1"/>
+          </a:fontRef>
+        </p:style>
+        <p:txBody>
+          <a:bodyPr rtlCol="0" anchor="ctr"/>
+          <a:lstStyle/>
+          <a:p>
+            <a:pPr algn="ctr"/>
+          </a:p>
+        </p:txBody>
+      </p:sp>
+      <p:sp>
+        <p:nvSpPr>
+          <p:cNvPr id="6" name="TextBox 5"/>
+          <p:cNvSpPr txBox="1"/>
+          <p:nvPr/>
+        </p:nvSpPr>
+        <p:spPr>
+          <a:xfrm>
+            <a:off x="900000" y="1440000"/>
+            <a:ext cx="10440000" cy="5040000"/>
+          </a:xfrm>
+          <a:prstGeom prst="rect">
+            <a:avLst/>
+          </a:prstGeom>
+          <a:noFill/>
+        </p:spPr>
+        <p:txBody>
           <a:bodyPr wrap="square">
             <a:spAutoFit/>
           </a:bodyPr>
@@ -5103,23 +6344,51 @@
           <a:p/>
           <a:p>
             <a:pPr>
-              <a:spcAft>
-                <a:spcPts val="400"/>
+              <a:spcBef>
+                <a:spcPts val="1200"/>
+              </a:spcBef>
+              <a:spcAft>
+                <a:spcPts val="300"/>
+              </a:spcAft>
+              <a:defRPr sz="1500" b="1">
+                <a:solidFill>
+                  <a:srgbClr val="1D4ED8"/>
+                </a:solidFill>
+              </a:defRPr>
+            </a:pPr>
+            <a:r>
+              <a:t>▶ 핵심 컨셉: Holland + MBTI 연속 스펙트럼 + 공공데이터 AI 매칭</a:t>
+            </a:r>
+          </a:p>
+          <a:p>
+            <a:pPr>
+              <a:spcAft>
+                <a:spcPts val="800"/>
+              </a:spcAft>
+            </a:pPr>
+          </a:p>
+          <a:p>
+            <a:pPr>
+              <a:spcBef>
+                <a:spcPts val="800"/>
+              </a:spcBef>
+              <a:spcAft>
+                <a:spcPts val="300"/>
               </a:spcAft>
               <a:defRPr sz="1400" b="1">
                 <a:solidFill>
-                  <a:srgbClr val="2563EB"/>
-                </a:solidFill>
-              </a:defRPr>
-            </a:pPr>
-            <a:r>
-              <a:t>▶ 핵심 아이디어: Holland 검사 + MBTI 연속 스펙트럼 + 공공데이터 AI 매칭</a:t>
-            </a:r>
-          </a:p>
-          <a:p>
-            <a:pPr>
-              <a:spcAft>
-                <a:spcPts val="400"/>
+                  <a:srgbClr val="0F172A"/>
+                </a:solidFill>
+              </a:defRPr>
+            </a:pPr>
+            <a:r>
+              <a:t>■ MBTI 연속 스펙트럼 (기존 대비 차별점)</a:t>
+            </a:r>
+          </a:p>
+          <a:p>
+            <a:pPr>
+              <a:spcAft>
+                <a:spcPts val="300"/>
               </a:spcAft>
               <a:defRPr sz="1300">
                 <a:solidFill>
@@ -5127,71 +6396,139 @@
                 </a:solidFill>
               </a:defRPr>
             </a:pPr>
-          </a:p>
-          <a:p>
-            <a:pPr>
-              <a:spcAft>
-                <a:spcPts val="400"/>
+            <a:r>
+              <a:t>  • 기존: E or I (이분법) → 나침반: EI축 0~100 연속값</a:t>
+            </a:r>
+          </a:p>
+          <a:p>
+            <a:pPr>
+              <a:spcAft>
+                <a:spcPts val="300"/>
+              </a:spcAft>
+              <a:defRPr sz="1300">
+                <a:solidFill>
+                  <a:srgbClr val="1E293B"/>
+                </a:solidFill>
+              </a:defRPr>
+            </a:pPr>
+            <a:r>
+              <a:t>  • 4축 × 4단계 = 256가지 조합 (실제로는 무한한 연속값)</a:t>
+            </a:r>
+          </a:p>
+          <a:p>
+            <a:pPr>
+              <a:spcAft>
+                <a:spcPts val="300"/>
+              </a:spcAft>
+              <a:defRPr sz="1300">
+                <a:solidFill>
+                  <a:srgbClr val="1E293B"/>
+                </a:solidFill>
+              </a:defRPr>
+            </a:pPr>
+            <a:r>
+              <a:t>  • 예: EI=35(약한E), SN=80(강한N), TF=25(강한T), JP=60(약한P)</a:t>
+            </a:r>
+          </a:p>
+          <a:p>
+            <a:pPr>
+              <a:spcAft>
+                <a:spcPts val="800"/>
+              </a:spcAft>
+            </a:pPr>
+          </a:p>
+          <a:p>
+            <a:pPr>
+              <a:spcBef>
+                <a:spcPts val="800"/>
+              </a:spcBef>
+              <a:spcAft>
+                <a:spcPts val="300"/>
               </a:spcAft>
               <a:defRPr sz="1400" b="1">
                 <a:solidFill>
-                  <a:srgbClr val="2563EB"/>
-                </a:solidFill>
-              </a:defRPr>
-            </a:pPr>
-            <a:r>
-              <a:t>■ MBTI 연속 스펙트럼</a:t>
-            </a:r>
-          </a:p>
-          <a:p>
-            <a:pPr>
-              <a:spcAft>
-                <a:spcPts val="400"/>
-              </a:spcAft>
-              <a:defRPr sz="1200">
+                  <a:srgbClr val="0F172A"/>
+                </a:solidFill>
+              </a:defRPr>
+            </a:pPr>
+            <a:r>
+              <a:t>■ 이중 매칭 구조</a:t>
+            </a:r>
+          </a:p>
+          <a:p>
+            <a:pPr>
+              <a:spcAft>
+                <a:spcPts val="300"/>
+              </a:spcAft>
+              <a:defRPr sz="1300">
                 <a:solidFill>
                   <a:srgbClr val="1E293B"/>
                 </a:solidFill>
               </a:defRPr>
             </a:pPr>
             <a:r>
-              <a:t>  • 기존 16유형 → 4축 × 0~100 연속값 (256가지+ 조합)</a:t>
-            </a:r>
-          </a:p>
-          <a:p>
-            <a:pPr>
-              <a:spcAft>
-                <a:spcPts val="400"/>
-              </a:spcAft>
-              <a:defRPr sz="1200">
+              <a:t>  • 1차: Holland(RIASEC) 코사인 유사도 → 직업군 필터 (가중치 60%)</a:t>
+            </a:r>
+          </a:p>
+          <a:p>
+            <a:pPr>
+              <a:spcAft>
+                <a:spcPts val="300"/>
+              </a:spcAft>
+              <a:defRPr sz="1300">
                 <a:solidFill>
                   <a:srgbClr val="1E293B"/>
                 </a:solidFill>
               </a:defRPr>
             </a:pPr>
             <a:r>
-              <a:t>  • 각 축: 강한E / 약한E / 약한I / 강한I (4단계)</a:t>
-            </a:r>
-          </a:p>
-          <a:p>
-            <a:pPr>
-              <a:spcAft>
-                <a:spcPts val="400"/>
-              </a:spcAft>
-              <a:defRPr sz="1200">
+              <a:t>  • 2차: MBTI 유클리드 거리 → 직업 내 세부 매칭 (가중치 40%)</a:t>
+            </a:r>
+          </a:p>
+          <a:p>
+            <a:pPr>
+              <a:spcAft>
+                <a:spcPts val="300"/>
+              </a:spcAft>
+              <a:defRPr sz="1300">
                 <a:solidFill>
                   <a:srgbClr val="1E293B"/>
                 </a:solidFill>
               </a:defRPr>
             </a:pPr>
             <a:r>
-              <a:t>  • 직업에도 MBTI 4축 연속값을 부여 → 유클리드 거리로 정밀 매칭</a:t>
-            </a:r>
-          </a:p>
-          <a:p>
-            <a:pPr>
-              <a:spcAft>
-                <a:spcPts val="400"/>
+              <a:t>  • 3차: 공공데이터 기반 학과 → 교과목 → 학교 연결</a:t>
+            </a:r>
+          </a:p>
+          <a:p>
+            <a:pPr>
+              <a:spcAft>
+                <a:spcPts val="800"/>
+              </a:spcAft>
+            </a:pPr>
+          </a:p>
+          <a:p>
+            <a:pPr>
+              <a:spcBef>
+                <a:spcPts val="800"/>
+              </a:spcBef>
+              <a:spcAft>
+                <a:spcPts val="300"/>
+              </a:spcAft>
+              <a:defRPr sz="1400" b="1">
+                <a:solidFill>
+                  <a:srgbClr val="0F172A"/>
+                </a:solidFill>
+              </a:defRPr>
+            </a:pPr>
+            <a:r>
+              <a:t>■ 결과 제공</a:t>
+            </a:r>
+          </a:p>
+          <a:p>
+            <a:pPr>
+              <a:spcAft>
+                <a:spcPts val="300"/>
               </a:spcAft>
               <a:defRPr sz="1300">
                 <a:solidFill>
@@ -5199,65 +6536,8 @@
                 </a:solidFill>
               </a:defRPr>
             </a:pPr>
-          </a:p>
-          <a:p>
-            <a:pPr>
-              <a:spcAft>
-                <a:spcPts val="400"/>
-              </a:spcAft>
-              <a:defRPr sz="1400" b="1">
-                <a:solidFill>
-                  <a:srgbClr val="2563EB"/>
-                </a:solidFill>
-              </a:defRPr>
-            </a:pPr>
-            <a:r>
-              <a:t>■ 이중 매칭 구조</a:t>
-            </a:r>
-          </a:p>
-          <a:p>
-            <a:pPr>
-              <a:spcAft>
-                <a:spcPts val="400"/>
-              </a:spcAft>
-              <a:defRPr sz="1200">
-                <a:solidFill>
-                  <a:srgbClr val="1E293B"/>
-                </a:solidFill>
-              </a:defRPr>
-            </a:pPr>
-            <a:r>
-              <a:t>  • Holland(RIASEC) → 직업군 1차 필터 (코사인 유사도, 가중치 60%)</a:t>
-            </a:r>
-          </a:p>
-          <a:p>
-            <a:pPr>
-              <a:spcAft>
-                <a:spcPts val="400"/>
-              </a:spcAft>
-              <a:defRPr sz="1200">
-                <a:solidFill>
-                  <a:srgbClr val="1E293B"/>
-                </a:solidFill>
-              </a:defRPr>
-            </a:pPr>
-            <a:r>
-              <a:t>  • MBTI 스펙트럼 → 직업군 내 세부 매칭 (유클리드 거리, 가중치 40%)</a:t>
-            </a:r>
-          </a:p>
-          <a:p>
-            <a:pPr>
-              <a:spcAft>
-                <a:spcPts val="400"/>
-              </a:spcAft>
-              <a:defRPr sz="1200">
-                <a:solidFill>
-                  <a:srgbClr val="1E293B"/>
-                </a:solidFill>
-              </a:defRPr>
-            </a:pPr>
-            <a:r>
-              <a:t>  • 공공데이터 → 실제 학과/학교 연결</a:t>
+            <a:r>
+              <a:t>  • 추천 진로 Top 5 + 목표 매칭도 비교 + 맞춤 학교 + 교육과정 로드맵</a:t>
             </a:r>
           </a:p>
         </p:txBody>
@@ -5273,6 +6553,14 @@
 <file path=ppt/slides/slide5.xml><?xml version="1.0" encoding="utf-8"?>
 <p:sld xmlns:a="http://schemas.openxmlformats.org/drawingml/2006/main" xmlns:p="http://schemas.openxmlformats.org/presentationml/2006/main" xmlns:r="http://schemas.openxmlformats.org/officeDocument/2006/relationships">
   <p:cSld>
+    <p:bg>
+      <p:bgPr>
+        <a:solidFill>
+          <a:srgbClr val="FFFFFF"/>
+        </a:solidFill>
+        <a:effectLst/>
+      </p:bgPr>
+    </p:bg>
     <p:spTree>
       <p:nvGrpSpPr>
         <p:cNvPr id="1" name=""/>
@@ -5282,14 +6570,57 @@
       <p:grpSpPr/>
       <p:sp>
         <p:nvSpPr>
-          <p:cNvPr id="2" name="TextBox 1"/>
+          <p:cNvPr id="2" name="Rectangle 1"/>
+          <p:cNvSpPr/>
+          <p:nvPr/>
+        </p:nvSpPr>
+        <p:spPr>
+          <a:xfrm>
+            <a:off x="0" y="0"/>
+            <a:ext cx="288000" cy="6858000"/>
+          </a:xfrm>
+          <a:prstGeom prst="rect">
+            <a:avLst/>
+          </a:prstGeom>
+          <a:solidFill>
+            <a:srgbClr val="1D4ED8"/>
+          </a:solidFill>
+          <a:ln>
+            <a:noFill/>
+          </a:ln>
+        </p:spPr>
+        <p:style>
+          <a:lnRef idx="1">
+            <a:schemeClr val="accent1"/>
+          </a:lnRef>
+          <a:fillRef idx="3">
+            <a:schemeClr val="accent1"/>
+          </a:fillRef>
+          <a:effectRef idx="2">
+            <a:schemeClr val="accent1"/>
+          </a:effectRef>
+          <a:fontRef idx="minor">
+            <a:schemeClr val="lt1"/>
+          </a:fontRef>
+        </p:style>
+        <p:txBody>
+          <a:bodyPr rtlCol="0" anchor="ctr"/>
+          <a:lstStyle/>
+          <a:p>
+            <a:pPr algn="ctr"/>
+          </a:p>
+        </p:txBody>
+      </p:sp>
+      <p:sp>
+        <p:nvSpPr>
+          <p:cNvPr id="3" name="TextBox 2"/>
           <p:cNvSpPr txBox="1"/>
           <p:nvPr/>
         </p:nvSpPr>
         <p:spPr>
           <a:xfrm>
-            <a:off x="720000" y="360000"/>
-            <a:ext cx="9360000" cy="720000"/>
+            <a:off x="11160000" y="6300000"/>
+            <a:ext cx="720000" cy="360000"/>
           </a:xfrm>
           <a:prstGeom prst="rect">
             <a:avLst/>
@@ -5302,29 +6633,29 @@
           </a:bodyPr>
           <a:lstStyle/>
           <a:p>
-            <a:pPr>
-              <a:defRPr sz="2400" b="1">
-                <a:solidFill>
-                  <a:srgbClr val="1E293B"/>
-                </a:solidFill>
-              </a:defRPr>
-            </a:pPr>
-            <a:r>
-              <a:t>3. AI 활용 과정</a:t>
-            </a:r>
-          </a:p>
-        </p:txBody>
-      </p:sp>
-      <p:sp>
-        <p:nvSpPr>
-          <p:cNvPr id="3" name="TextBox 2"/>
+            <a:pPr algn="r">
+              <a:defRPr sz="1000">
+                <a:solidFill>
+                  <a:srgbClr val="94A3B8"/>
+                </a:solidFill>
+              </a:defRPr>
+            </a:pPr>
+            <a:r>
+              <a:t>4</a:t>
+            </a:r>
+          </a:p>
+        </p:txBody>
+      </p:sp>
+      <p:sp>
+        <p:nvSpPr>
+          <p:cNvPr id="4" name="TextBox 3"/>
           <p:cNvSpPr txBox="1"/>
           <p:nvPr/>
         </p:nvSpPr>
         <p:spPr>
           <a:xfrm>
-            <a:off x="720000" y="1440000"/>
-            <a:ext cx="9360000" cy="5400000"/>
+            <a:off x="900000" y="360000"/>
+            <a:ext cx="10080000" cy="900000"/>
           </a:xfrm>
           <a:prstGeom prst="rect">
             <a:avLst/>
@@ -5332,6 +6663,84 @@
           <a:noFill/>
         </p:spPr>
         <p:txBody>
+          <a:bodyPr wrap="none">
+            <a:spAutoFit/>
+          </a:bodyPr>
+          <a:lstStyle/>
+          <a:p>
+            <a:pPr>
+              <a:defRPr sz="2600" b="1">
+                <a:solidFill>
+                  <a:srgbClr val="0F172A"/>
+                </a:solidFill>
+              </a:defRPr>
+            </a:pPr>
+            <a:r>
+              <a:t>AI 활용 과정</a:t>
+            </a:r>
+          </a:p>
+        </p:txBody>
+      </p:sp>
+      <p:sp>
+        <p:nvSpPr>
+          <p:cNvPr id="5" name="Rectangle 4"/>
+          <p:cNvSpPr/>
+          <p:nvPr/>
+        </p:nvSpPr>
+        <p:spPr>
+          <a:xfrm>
+            <a:off x="900000" y="1152000"/>
+            <a:ext cx="1440000" cy="36000"/>
+          </a:xfrm>
+          <a:prstGeom prst="rect">
+            <a:avLst/>
+          </a:prstGeom>
+          <a:solidFill>
+            <a:srgbClr val="3B82F6"/>
+          </a:solidFill>
+          <a:ln>
+            <a:noFill/>
+          </a:ln>
+        </p:spPr>
+        <p:style>
+          <a:lnRef idx="1">
+            <a:schemeClr val="accent1"/>
+          </a:lnRef>
+          <a:fillRef idx="3">
+            <a:schemeClr val="accent1"/>
+          </a:fillRef>
+          <a:effectRef idx="2">
+            <a:schemeClr val="accent1"/>
+          </a:effectRef>
+          <a:fontRef idx="minor">
+            <a:schemeClr val="lt1"/>
+          </a:fontRef>
+        </p:style>
+        <p:txBody>
+          <a:bodyPr rtlCol="0" anchor="ctr"/>
+          <a:lstStyle/>
+          <a:p>
+            <a:pPr algn="ctr"/>
+          </a:p>
+        </p:txBody>
+      </p:sp>
+      <p:sp>
+        <p:nvSpPr>
+          <p:cNvPr id="6" name="TextBox 5"/>
+          <p:cNvSpPr txBox="1"/>
+          <p:nvPr/>
+        </p:nvSpPr>
+        <p:spPr>
+          <a:xfrm>
+            <a:off x="900000" y="1440000"/>
+            <a:ext cx="10440000" cy="5040000"/>
+          </a:xfrm>
+          <a:prstGeom prst="rect">
+            <a:avLst/>
+          </a:prstGeom>
+          <a:noFill/>
+        </p:spPr>
+        <p:txBody>
           <a:bodyPr wrap="square">
             <a:spAutoFit/>
           </a:bodyPr>
@@ -5339,53 +6748,81 @@
           <a:p/>
           <a:p>
             <a:pPr>
-              <a:spcAft>
-                <a:spcPts val="400"/>
-              </a:spcAft>
-              <a:defRPr sz="1400" b="1">
-                <a:solidFill>
-                  <a:srgbClr val="2563EB"/>
-                </a:solidFill>
-              </a:defRPr>
-            </a:pPr>
-            <a:r>
-              <a:t>▶ 데이터 전처리</a:t>
-            </a:r>
-          </a:p>
-          <a:p>
-            <a:pPr>
-              <a:spcAft>
-                <a:spcPts val="400"/>
-              </a:spcAft>
-              <a:defRPr sz="1200">
+              <a:spcBef>
+                <a:spcPts val="1200"/>
+              </a:spcBef>
+              <a:spcAft>
+                <a:spcPts val="300"/>
+              </a:spcAft>
+              <a:defRPr sz="1500" b="1">
+                <a:solidFill>
+                  <a:srgbClr val="1D4ED8"/>
+                </a:solidFill>
+              </a:defRPr>
+            </a:pPr>
+            <a:r>
+              <a:t>▶ Step 1: 데이터 수집 및 전처리</a:t>
+            </a:r>
+          </a:p>
+          <a:p>
+            <a:pPr>
+              <a:spcAft>
+                <a:spcPts val="300"/>
+              </a:spcAft>
+              <a:defRPr sz="1300">
                 <a:solidFill>
                   <a:srgbClr val="1E293B"/>
                 </a:solidFill>
               </a:defRPr>
             </a:pPr>
             <a:r>
-              <a:t>  • 나이스 API → 전국 고등학교 기본정보 + 개설 교과목 수집</a:t>
-            </a:r>
-          </a:p>
-          <a:p>
-            <a:pPr>
-              <a:spcAft>
-                <a:spcPts val="400"/>
-              </a:spcAft>
-              <a:defRPr sz="1200">
+              <a:t>  • 나이스 API → 고등학교 기본정보 + 시간표(개설 교과목) 수집</a:t>
+            </a:r>
+          </a:p>
+          <a:p>
+            <a:pPr>
+              <a:spcAft>
+                <a:spcPts val="300"/>
+              </a:spcAft>
+              <a:defRPr sz="1300">
                 <a:solidFill>
                   <a:srgbClr val="1E293B"/>
                 </a:solidFill>
               </a:defRPr>
             </a:pPr>
             <a:r>
-              <a:t>  • 워크넷 API → 462개 직업별 능력(35개) / 지식(30개) 점수 수집</a:t>
-            </a:r>
-          </a:p>
-          <a:p>
-            <a:pPr>
-              <a:spcAft>
-                <a:spcPts val="400"/>
+              <a:t>  • 워크넷 API → 462개 직업별 능력(35개)/지식(30개) 점수 수집</a:t>
+            </a:r>
+          </a:p>
+          <a:p>
+            <a:pPr>
+              <a:spcAft>
+                <a:spcPts val="800"/>
+              </a:spcAft>
+            </a:pPr>
+          </a:p>
+          <a:p>
+            <a:pPr>
+              <a:spcBef>
+                <a:spcPts val="1200"/>
+              </a:spcBef>
+              <a:spcAft>
+                <a:spcPts val="300"/>
+              </a:spcAft>
+              <a:defRPr sz="1500" b="1">
+                <a:solidFill>
+                  <a:srgbClr val="1D4ED8"/>
+                </a:solidFill>
+              </a:defRPr>
+            </a:pPr>
+            <a:r>
+              <a:t>▶ Step 2: AI 모델링 (공공데이터 → Holland/MBTI 프로필 산출)</a:t>
+            </a:r>
+          </a:p>
+          <a:p>
+            <a:pPr>
+              <a:spcAft>
+                <a:spcPts val="300"/>
               </a:spcAft>
               <a:defRPr sz="1300">
                 <a:solidFill>
@@ -5393,71 +6830,84 @@
                 </a:solidFill>
               </a:defRPr>
             </a:pPr>
-          </a:p>
-          <a:p>
-            <a:pPr>
-              <a:spcAft>
-                <a:spcPts val="400"/>
-              </a:spcAft>
-              <a:defRPr sz="1400" b="1">
-                <a:solidFill>
-                  <a:srgbClr val="2563EB"/>
-                </a:solidFill>
-              </a:defRPr>
-            </a:pPr>
-            <a:r>
-              <a:t>▶ AI 모델링</a:t>
-            </a:r>
-          </a:p>
-          <a:p>
-            <a:pPr>
-              <a:spcAft>
-                <a:spcPts val="400"/>
-              </a:spcAft>
-              <a:defRPr sz="1200">
+            <a:r>
+              <a:t>  • Holland: 워크넷 능력 키워드를 RIASEC 6유형에 매핑 → 유형별 평균 점수</a:t>
+            </a:r>
+          </a:p>
+          <a:p>
+            <a:pPr>
+              <a:spcAft>
+                <a:spcPts val="300"/>
+              </a:spcAft>
+              <a:defRPr sz="1300">
                 <a:solidFill>
                   <a:srgbClr val="1E293B"/>
                 </a:solidFill>
               </a:defRPr>
             </a:pPr>
             <a:r>
-              <a:t>  • 워크넷 능력 점수 → Holland RIASEC 6축 점수 산출 (키워드 매핑)</a:t>
-            </a:r>
-          </a:p>
-          <a:p>
-            <a:pPr>
-              <a:spcAft>
-                <a:spcPts val="400"/>
-              </a:spcAft>
-              <a:defRPr sz="1200">
+              <a:t>  • MBTI: 양방향 능력 키워드 비율로 4축 연속값 산출</a:t>
+            </a:r>
+          </a:p>
+          <a:p>
+            <a:pPr>
+              <a:spcAft>
+                <a:spcPts val="300"/>
+              </a:spcAft>
+              <a:defRPr sz="1300">
                 <a:solidFill>
                   <a:srgbClr val="1E293B"/>
                 </a:solidFill>
               </a:defRPr>
             </a:pPr>
             <a:r>
-              <a:t>  • 워크넷 능력 점수 → MBTI 4축 연속값 산출 (양방향 비율 계산)</a:t>
-            </a:r>
-          </a:p>
-          <a:p>
-            <a:pPr>
-              <a:spcAft>
-                <a:spcPts val="400"/>
-              </a:spcAft>
-              <a:defRPr sz="1200">
+              <a:t>  • 공식: 축 값 = 두번째방향평균 / (첫번째 + 두번째) × 100</a:t>
+            </a:r>
+          </a:p>
+          <a:p>
+            <a:pPr>
+              <a:spcAft>
+                <a:spcPts val="800"/>
+              </a:spcAft>
+            </a:pPr>
+          </a:p>
+          <a:p>
+            <a:pPr>
+              <a:spcBef>
+                <a:spcPts val="1200"/>
+              </a:spcBef>
+              <a:spcAft>
+                <a:spcPts val="300"/>
+              </a:spcAft>
+              <a:defRPr sz="1500" b="1">
+                <a:solidFill>
+                  <a:srgbClr val="1D4ED8"/>
+                </a:solidFill>
+              </a:defRPr>
+            </a:pPr>
+            <a:r>
+              <a:t>▶ Step 3: 추론 및 매칭</a:t>
+            </a:r>
+          </a:p>
+          <a:p>
+            <a:pPr>
+              <a:spcAft>
+                <a:spcPts val="300"/>
+              </a:spcAft>
+              <a:defRPr sz="1300">
                 <a:solidFill>
                   <a:srgbClr val="1E293B"/>
                 </a:solidFill>
               </a:defRPr>
             </a:pPr>
             <a:r>
-              <a:t>  • 산출 공식: 축 값 = 두번째방향평균 / (첫번째 + 두번째) × 100</a:t>
-            </a:r>
-          </a:p>
-          <a:p>
-            <a:pPr>
-              <a:spcAft>
-                <a:spcPts val="400"/>
+              <a:t>  • 학생 프로필 ↔ 직업 프로필 유사도 계산 → 적합 직업 순위화</a:t>
+            </a:r>
+          </a:p>
+          <a:p>
+            <a:pPr>
+              <a:spcAft>
+                <a:spcPts val="300"/>
               </a:spcAft>
               <a:defRPr sz="1300">
                 <a:solidFill>
@@ -5465,80 +6915,23 @@
                 </a:solidFill>
               </a:defRPr>
             </a:pPr>
-          </a:p>
-          <a:p>
-            <a:pPr>
-              <a:spcAft>
-                <a:spcPts val="400"/>
-              </a:spcAft>
-              <a:defRPr sz="1400" b="1">
-                <a:solidFill>
-                  <a:srgbClr val="2563EB"/>
-                </a:solidFill>
-              </a:defRPr>
-            </a:pPr>
-            <a:r>
-              <a:t>▶ 추론/매칭 절차</a:t>
-            </a:r>
-          </a:p>
-          <a:p>
-            <a:pPr>
-              <a:spcAft>
-                <a:spcPts val="400"/>
-              </a:spcAft>
-              <a:defRPr sz="1200">
+            <a:r>
+              <a:t>  • 적합 직업 → 관련 학과 → 필수 교과목 → 해당 과목 개설 학교 필터</a:t>
+            </a:r>
+          </a:p>
+          <a:p>
+            <a:pPr>
+              <a:spcAft>
+                <a:spcPts val="300"/>
+              </a:spcAft>
+              <a:defRPr sz="1300">
                 <a:solidFill>
                   <a:srgbClr val="1E293B"/>
                 </a:solidFill>
               </a:defRPr>
             </a:pPr>
             <a:r>
-              <a:t>  • Step 1: 학생 Holland + MBTI → 직업 유사도 계산 → Top 5 추천</a:t>
-            </a:r>
-          </a:p>
-          <a:p>
-            <a:pPr>
-              <a:spcAft>
-                <a:spcPts val="400"/>
-              </a:spcAft>
-              <a:defRPr sz="1200">
-                <a:solidFill>
-                  <a:srgbClr val="1E293B"/>
-                </a:solidFill>
-              </a:defRPr>
-            </a:pPr>
-            <a:r>
-              <a:t>  • Step 2: 추천 직업 → 관련 학과 → 필수 교과목 추출</a:t>
-            </a:r>
-          </a:p>
-          <a:p>
-            <a:pPr>
-              <a:spcAft>
-                <a:spcPts val="400"/>
-              </a:spcAft>
-              <a:defRPr sz="1200">
-                <a:solidFill>
-                  <a:srgbClr val="1E293B"/>
-                </a:solidFill>
-              </a:defRPr>
-            </a:pPr>
-            <a:r>
-              <a:t>  • Step 3: 교과목 개설 학교 필터 + 성별/거주지 기반 매칭</a:t>
-            </a:r>
-          </a:p>
-          <a:p>
-            <a:pPr>
-              <a:spcAft>
-                <a:spcPts val="400"/>
-              </a:spcAft>
-              <a:defRPr sz="1200">
-                <a:solidFill>
-                  <a:srgbClr val="1E293B"/>
-                </a:solidFill>
-              </a:defRPr>
-            </a:pPr>
-            <a:r>
-              <a:t>  • Step 4: 교육과정 로드맵 생성 (고1→고2→고3)</a:t>
+              <a:t>  • 성별 필터 + 거주지 근접도(동/구 단위) 반영 → 최종 학교 추천</a:t>
             </a:r>
           </a:p>
         </p:txBody>
@@ -5554,6 +6947,14 @@
 <file path=ppt/slides/slide6.xml><?xml version="1.0" encoding="utf-8"?>
 <p:sld xmlns:a="http://schemas.openxmlformats.org/drawingml/2006/main" xmlns:p="http://schemas.openxmlformats.org/presentationml/2006/main" xmlns:r="http://schemas.openxmlformats.org/officeDocument/2006/relationships">
   <p:cSld>
+    <p:bg>
+      <p:bgPr>
+        <a:solidFill>
+          <a:srgbClr val="FFFFFF"/>
+        </a:solidFill>
+        <a:effectLst/>
+      </p:bgPr>
+    </p:bg>
     <p:spTree>
       <p:nvGrpSpPr>
         <p:cNvPr id="1" name=""/>
@@ -5563,14 +6964,57 @@
       <p:grpSpPr/>
       <p:sp>
         <p:nvSpPr>
-          <p:cNvPr id="2" name="TextBox 1"/>
+          <p:cNvPr id="2" name="Rectangle 1"/>
+          <p:cNvSpPr/>
+          <p:nvPr/>
+        </p:nvSpPr>
+        <p:spPr>
+          <a:xfrm>
+            <a:off x="0" y="0"/>
+            <a:ext cx="288000" cy="6858000"/>
+          </a:xfrm>
+          <a:prstGeom prst="rect">
+            <a:avLst/>
+          </a:prstGeom>
+          <a:solidFill>
+            <a:srgbClr val="1D4ED8"/>
+          </a:solidFill>
+          <a:ln>
+            <a:noFill/>
+          </a:ln>
+        </p:spPr>
+        <p:style>
+          <a:lnRef idx="1">
+            <a:schemeClr val="accent1"/>
+          </a:lnRef>
+          <a:fillRef idx="3">
+            <a:schemeClr val="accent1"/>
+          </a:fillRef>
+          <a:effectRef idx="2">
+            <a:schemeClr val="accent1"/>
+          </a:effectRef>
+          <a:fontRef idx="minor">
+            <a:schemeClr val="lt1"/>
+          </a:fontRef>
+        </p:style>
+        <p:txBody>
+          <a:bodyPr rtlCol="0" anchor="ctr"/>
+          <a:lstStyle/>
+          <a:p>
+            <a:pPr algn="ctr"/>
+          </a:p>
+        </p:txBody>
+      </p:sp>
+      <p:sp>
+        <p:nvSpPr>
+          <p:cNvPr id="3" name="TextBox 2"/>
           <p:cNvSpPr txBox="1"/>
           <p:nvPr/>
         </p:nvSpPr>
         <p:spPr>
           <a:xfrm>
-            <a:off x="720000" y="360000"/>
-            <a:ext cx="9360000" cy="720000"/>
+            <a:off x="11160000" y="6300000"/>
+            <a:ext cx="720000" cy="360000"/>
           </a:xfrm>
           <a:prstGeom prst="rect">
             <a:avLst/>
@@ -5583,29 +7027,29 @@
           </a:bodyPr>
           <a:lstStyle/>
           <a:p>
-            <a:pPr>
-              <a:defRPr sz="2400" b="1">
-                <a:solidFill>
-                  <a:srgbClr val="1E293B"/>
-                </a:solidFill>
-              </a:defRPr>
-            </a:pPr>
-            <a:r>
-              <a:t>4. 서비스 사용자 플로우</a:t>
-            </a:r>
-          </a:p>
-        </p:txBody>
-      </p:sp>
-      <p:sp>
-        <p:nvSpPr>
-          <p:cNvPr id="3" name="TextBox 2"/>
+            <a:pPr algn="r">
+              <a:defRPr sz="1000">
+                <a:solidFill>
+                  <a:srgbClr val="94A3B8"/>
+                </a:solidFill>
+              </a:defRPr>
+            </a:pPr>
+            <a:r>
+              <a:t>5</a:t>
+            </a:r>
+          </a:p>
+        </p:txBody>
+      </p:sp>
+      <p:sp>
+        <p:nvSpPr>
+          <p:cNvPr id="4" name="TextBox 3"/>
           <p:cNvSpPr txBox="1"/>
           <p:nvPr/>
         </p:nvSpPr>
         <p:spPr>
           <a:xfrm>
-            <a:off x="720000" y="1440000"/>
-            <a:ext cx="9360000" cy="5400000"/>
+            <a:off x="900000" y="360000"/>
+            <a:ext cx="10080000" cy="900000"/>
           </a:xfrm>
           <a:prstGeom prst="rect">
             <a:avLst/>
@@ -5613,6 +7057,84 @@
           <a:noFill/>
         </p:spPr>
         <p:txBody>
+          <a:bodyPr wrap="none">
+            <a:spAutoFit/>
+          </a:bodyPr>
+          <a:lstStyle/>
+          <a:p>
+            <a:pPr>
+              <a:defRPr sz="2600" b="1">
+                <a:solidFill>
+                  <a:srgbClr val="0F172A"/>
+                </a:solidFill>
+              </a:defRPr>
+            </a:pPr>
+            <a:r>
+              <a:t>서비스 사용자 플로우</a:t>
+            </a:r>
+          </a:p>
+        </p:txBody>
+      </p:sp>
+      <p:sp>
+        <p:nvSpPr>
+          <p:cNvPr id="5" name="Rectangle 4"/>
+          <p:cNvSpPr/>
+          <p:nvPr/>
+        </p:nvSpPr>
+        <p:spPr>
+          <a:xfrm>
+            <a:off x="900000" y="1152000"/>
+            <a:ext cx="1440000" cy="36000"/>
+          </a:xfrm>
+          <a:prstGeom prst="rect">
+            <a:avLst/>
+          </a:prstGeom>
+          <a:solidFill>
+            <a:srgbClr val="3B82F6"/>
+          </a:solidFill>
+          <a:ln>
+            <a:noFill/>
+          </a:ln>
+        </p:spPr>
+        <p:style>
+          <a:lnRef idx="1">
+            <a:schemeClr val="accent1"/>
+          </a:lnRef>
+          <a:fillRef idx="3">
+            <a:schemeClr val="accent1"/>
+          </a:fillRef>
+          <a:effectRef idx="2">
+            <a:schemeClr val="accent1"/>
+          </a:effectRef>
+          <a:fontRef idx="minor">
+            <a:schemeClr val="lt1"/>
+          </a:fontRef>
+        </p:style>
+        <p:txBody>
+          <a:bodyPr rtlCol="0" anchor="ctr"/>
+          <a:lstStyle/>
+          <a:p>
+            <a:pPr algn="ctr"/>
+          </a:p>
+        </p:txBody>
+      </p:sp>
+      <p:sp>
+        <p:nvSpPr>
+          <p:cNvPr id="6" name="TextBox 5"/>
+          <p:cNvSpPr txBox="1"/>
+          <p:nvPr/>
+        </p:nvSpPr>
+        <p:spPr>
+          <a:xfrm>
+            <a:off x="900000" y="1440000"/>
+            <a:ext cx="10440000" cy="5040000"/>
+          </a:xfrm>
+          <a:prstGeom prst="rect">
+            <a:avLst/>
+          </a:prstGeom>
+          <a:noFill/>
+        </p:spPr>
+        <p:txBody>
           <a:bodyPr wrap="square">
             <a:spAutoFit/>
           </a:bodyPr>
@@ -5620,83 +7142,111 @@
           <a:p/>
           <a:p>
             <a:pPr>
-              <a:spcAft>
-                <a:spcPts val="400"/>
-              </a:spcAft>
-              <a:defRPr sz="1400" b="1">
-                <a:solidFill>
-                  <a:srgbClr val="2563EB"/>
-                </a:solidFill>
-              </a:defRPr>
-            </a:pPr>
-            <a:r>
-              <a:t>▶ 입력 단계</a:t>
-            </a:r>
-          </a:p>
-          <a:p>
-            <a:pPr>
-              <a:spcAft>
-                <a:spcPts val="400"/>
-              </a:spcAft>
-              <a:defRPr sz="1200">
+              <a:spcBef>
+                <a:spcPts val="1200"/>
+              </a:spcBef>
+              <a:spcAft>
+                <a:spcPts val="300"/>
+              </a:spcAft>
+              <a:defRPr sz="1500" b="1">
+                <a:solidFill>
+                  <a:srgbClr val="1D4ED8"/>
+                </a:solidFill>
+              </a:defRPr>
+            </a:pPr>
+            <a:r>
+              <a:t>▶ 입력 단계 (약 8~10분 소요)</a:t>
+            </a:r>
+          </a:p>
+          <a:p>
+            <a:pPr>
+              <a:spcAft>
+                <a:spcPts val="300"/>
+              </a:spcAft>
+              <a:defRPr sz="1300">
                 <a:solidFill>
                   <a:srgbClr val="1E293B"/>
                 </a:solidFill>
               </a:defRPr>
             </a:pPr>
             <a:r>
-              <a:t>  [Step 1] 목표 입력 (선택) - 희망 학교/대학/학과/직업 (자동완성, 건너뛰기 가능)</a:t>
-            </a:r>
-          </a:p>
-          <a:p>
-            <a:pPr>
-              <a:spcAft>
-                <a:spcPts val="400"/>
-              </a:spcAft>
-              <a:defRPr sz="1200">
+              <a:t>  • [Step 1] 목표 입력 — 희망 학교/학과/직업 자동완성 선택 (건너뛰기 가능)</a:t>
+            </a:r>
+          </a:p>
+          <a:p>
+            <a:pPr>
+              <a:spcAft>
+                <a:spcPts val="300"/>
+              </a:spcAft>
+              <a:defRPr sz="1300">
                 <a:solidFill>
                   <a:srgbClr val="1E293B"/>
                 </a:solidFill>
               </a:defRPr>
             </a:pPr>
             <a:r>
-              <a:t>  [Step 2] Holland 흥미 검사 - 18문항, 5점 척도 → RIASEC 6축 점수</a:t>
-            </a:r>
-          </a:p>
-          <a:p>
-            <a:pPr>
-              <a:spcAft>
-                <a:spcPts val="400"/>
-              </a:spcAft>
-              <a:defRPr sz="1200">
+              <a:t>  • [Step 2] Holland 흥미 검사 — 18문항 · 5점 척도 → RIASEC 6축 점수</a:t>
+            </a:r>
+          </a:p>
+          <a:p>
+            <a:pPr>
+              <a:spcAft>
+                <a:spcPts val="300"/>
+              </a:spcAft>
+              <a:defRPr sz="1300">
                 <a:solidFill>
                   <a:srgbClr val="1E293B"/>
                 </a:solidFill>
               </a:defRPr>
             </a:pPr>
             <a:r>
-              <a:t>  [Step 3] MBTI 스펙트럼 검사 - 32문항, 7점 척도 → 4축 연속값(0~100)</a:t>
-            </a:r>
-          </a:p>
-          <a:p>
-            <a:pPr>
-              <a:spcAft>
-                <a:spcPts val="400"/>
-              </a:spcAft>
-              <a:defRPr sz="1200">
+              <a:t>  • [Step 3] MBTI 스펙트럼 검사 — 32문항 · 7점 척도 → 4축 연속값(0~100)</a:t>
+            </a:r>
+          </a:p>
+          <a:p>
+            <a:pPr>
+              <a:spcAft>
+                <a:spcPts val="300"/>
+              </a:spcAft>
+              <a:defRPr sz="1300">
                 <a:solidFill>
                   <a:srgbClr val="1E293B"/>
                 </a:solidFill>
               </a:defRPr>
             </a:pPr>
             <a:r>
-              <a:t>  [Step 4] 추가 정보 - 성별, 거주지(시도/시군구/동), 학년</a:t>
-            </a:r>
-          </a:p>
-          <a:p>
-            <a:pPr>
-              <a:spcAft>
-                <a:spcPts val="400"/>
+              <a:t>  • [Step 4] 추가 정보 — 성별, 거주지(시도/시군구/동), 학년</a:t>
+            </a:r>
+          </a:p>
+          <a:p>
+            <a:pPr>
+              <a:spcAft>
+                <a:spcPts val="800"/>
+              </a:spcAft>
+            </a:pPr>
+          </a:p>
+          <a:p>
+            <a:pPr>
+              <a:spcBef>
+                <a:spcPts val="1200"/>
+              </a:spcBef>
+              <a:spcAft>
+                <a:spcPts val="300"/>
+              </a:spcAft>
+              <a:defRPr sz="1500" b="1">
+                <a:solidFill>
+                  <a:srgbClr val="1D4ED8"/>
+                </a:solidFill>
+              </a:defRPr>
+            </a:pPr>
+            <a:r>
+              <a:t>▶ 결과 대시보드 (AI 분석 후 즉시 제공)</a:t>
+            </a:r>
+          </a:p>
+          <a:p>
+            <a:pPr>
+              <a:spcAft>
+                <a:spcPts val="300"/>
               </a:spcAft>
               <a:defRPr sz="1300">
                 <a:solidFill>
@@ -5704,110 +7254,83 @@
                 </a:solidFill>
               </a:defRPr>
             </a:pPr>
-          </a:p>
-          <a:p>
-            <a:pPr>
-              <a:spcAft>
-                <a:spcPts val="400"/>
-              </a:spcAft>
-              <a:defRPr sz="1400" b="1">
-                <a:solidFill>
-                  <a:srgbClr val="2563EB"/>
-                </a:solidFill>
-              </a:defRPr>
-            </a:pPr>
-            <a:r>
-              <a:t>▶ 결과 대시보드</a:t>
-            </a:r>
-          </a:p>
-          <a:p>
-            <a:pPr>
-              <a:spcAft>
-                <a:spcPts val="400"/>
-              </a:spcAft>
-              <a:defRPr sz="1200">
+            <a:r>
+              <a:t>  • 📋 종합 의견 — 핵심 분석 결과 한줄 요약</a:t>
+            </a:r>
+          </a:p>
+          <a:p>
+            <a:pPr>
+              <a:spcAft>
+                <a:spcPts val="300"/>
+              </a:spcAft>
+              <a:defRPr sz="1300">
                 <a:solidFill>
                   <a:srgbClr val="1E293B"/>
                 </a:solidFill>
               </a:defRPr>
             </a:pPr>
             <a:r>
-              <a:t>  • 종합 의견 (핵심 요약)</a:t>
-            </a:r>
-          </a:p>
-          <a:p>
-            <a:pPr>
-              <a:spcAft>
-                <a:spcPts val="400"/>
-              </a:spcAft>
-              <a:defRPr sz="1200">
+              <a:t>  • 📊 프로필 시각화 — Holland 레이더 차트 + MBTI 스펙트럼 바(수치 포함)</a:t>
+            </a:r>
+          </a:p>
+          <a:p>
+            <a:pPr>
+              <a:spcAft>
+                <a:spcPts val="300"/>
+              </a:spcAft>
+              <a:defRPr sz="1300">
                 <a:solidFill>
                   <a:srgbClr val="1E293B"/>
                 </a:solidFill>
               </a:defRPr>
             </a:pPr>
             <a:r>
-              <a:t>  • 프로필 시각화 (Holland 레이더 차트 + MBTI 스펙트럼 바)</a:t>
-            </a:r>
-          </a:p>
-          <a:p>
-            <a:pPr>
-              <a:spcAft>
-                <a:spcPts val="400"/>
-              </a:spcAft>
-              <a:defRPr sz="1200">
+              <a:t>  • 🎯 목표 매칭도 — 입력 목표 vs AI 추천 적합도 비교 (0~100%)</a:t>
+            </a:r>
+          </a:p>
+          <a:p>
+            <a:pPr>
+              <a:spcAft>
+                <a:spcPts val="300"/>
+              </a:spcAft>
+              <a:defRPr sz="1300">
                 <a:solidFill>
                   <a:srgbClr val="1E293B"/>
                 </a:solidFill>
               </a:defRPr>
             </a:pPr>
             <a:r>
-              <a:t>  • 목표 매칭도 비교 (입력한 경우, 0~100% 판정)</a:t>
-            </a:r>
-          </a:p>
-          <a:p>
-            <a:pPr>
-              <a:spcAft>
-                <a:spcPts val="400"/>
-              </a:spcAft>
-              <a:defRPr sz="1200">
+              <a:t>  • 💼 추천 진로 Top 5 — 직업 설명 + 적합도 + 추천 이유 + 관련 학과</a:t>
+            </a:r>
+          </a:p>
+          <a:p>
+            <a:pPr>
+              <a:spcAft>
+                <a:spcPts val="300"/>
+              </a:spcAft>
+              <a:defRPr sz="1300">
                 <a:solidFill>
                   <a:srgbClr val="1E293B"/>
                 </a:solidFill>
               </a:defRPr>
             </a:pPr>
             <a:r>
-              <a:t>  • AI 추천 진로 Top 5 (직업 설명 + 적합도 + 추천 이유 + 관련 학과)</a:t>
-            </a:r>
-          </a:p>
-          <a:p>
-            <a:pPr>
-              <a:spcAft>
-                <a:spcPts val="400"/>
-              </a:spcAft>
-              <a:defRPr sz="1200">
+              <a:t>  • 🏫 추천 학교 3~10개 — 유형별 차등 정보, 더보기 지원</a:t>
+            </a:r>
+          </a:p>
+          <a:p>
+            <a:pPr>
+              <a:spcAft>
+                <a:spcPts val="300"/>
+              </a:spcAft>
+              <a:defRPr sz="1300">
                 <a:solidFill>
                   <a:srgbClr val="1E293B"/>
                 </a:solidFill>
               </a:defRPr>
             </a:pPr>
             <a:r>
-              <a:t>  • 추천 고등학교 3~10개 (유형별 정보 차등, 더보기 지원)</a:t>
-            </a:r>
-          </a:p>
-          <a:p>
-            <a:pPr>
-              <a:spcAft>
-                <a:spcPts val="400"/>
-              </a:spcAft>
-              <a:defRPr sz="1200">
-                <a:solidFill>
-                  <a:srgbClr val="1E293B"/>
-                </a:solidFill>
-              </a:defRPr>
-            </a:pPr>
-            <a:r>
-              <a:t>  • 교육과정 로드맵 (고1~고3 학년별 교과 + 비교과)</a:t>
+              <a:t>  • 📚 교육과정 로드맵 — 고1→고2→고3 추천 교과 + 비교과</a:t>
             </a:r>
           </a:p>
         </p:txBody>
@@ -5823,6 +7346,14 @@
 <file path=ppt/slides/slide7.xml><?xml version="1.0" encoding="utf-8"?>
 <p:sld xmlns:a="http://schemas.openxmlformats.org/drawingml/2006/main" xmlns:p="http://schemas.openxmlformats.org/presentationml/2006/main" xmlns:r="http://schemas.openxmlformats.org/officeDocument/2006/relationships">
   <p:cSld>
+    <p:bg>
+      <p:bgPr>
+        <a:solidFill>
+          <a:srgbClr val="FFFFFF"/>
+        </a:solidFill>
+        <a:effectLst/>
+      </p:bgPr>
+    </p:bg>
     <p:spTree>
       <p:nvGrpSpPr>
         <p:cNvPr id="1" name=""/>
@@ -5832,14 +7363,57 @@
       <p:grpSpPr/>
       <p:sp>
         <p:nvSpPr>
-          <p:cNvPr id="2" name="TextBox 1"/>
+          <p:cNvPr id="2" name="Rectangle 1"/>
+          <p:cNvSpPr/>
+          <p:nvPr/>
+        </p:nvSpPr>
+        <p:spPr>
+          <a:xfrm>
+            <a:off x="0" y="0"/>
+            <a:ext cx="288000" cy="6858000"/>
+          </a:xfrm>
+          <a:prstGeom prst="rect">
+            <a:avLst/>
+          </a:prstGeom>
+          <a:solidFill>
+            <a:srgbClr val="1D4ED8"/>
+          </a:solidFill>
+          <a:ln>
+            <a:noFill/>
+          </a:ln>
+        </p:spPr>
+        <p:style>
+          <a:lnRef idx="1">
+            <a:schemeClr val="accent1"/>
+          </a:lnRef>
+          <a:fillRef idx="3">
+            <a:schemeClr val="accent1"/>
+          </a:fillRef>
+          <a:effectRef idx="2">
+            <a:schemeClr val="accent1"/>
+          </a:effectRef>
+          <a:fontRef idx="minor">
+            <a:schemeClr val="lt1"/>
+          </a:fontRef>
+        </p:style>
+        <p:txBody>
+          <a:bodyPr rtlCol="0" anchor="ctr"/>
+          <a:lstStyle/>
+          <a:p>
+            <a:pPr algn="ctr"/>
+          </a:p>
+        </p:txBody>
+      </p:sp>
+      <p:sp>
+        <p:nvSpPr>
+          <p:cNvPr id="3" name="TextBox 2"/>
           <p:cNvSpPr txBox="1"/>
           <p:nvPr/>
         </p:nvSpPr>
         <p:spPr>
           <a:xfrm>
-            <a:off x="720000" y="180000"/>
-            <a:ext cx="9360000" cy="720000"/>
+            <a:off x="11160000" y="6300000"/>
+            <a:ext cx="720000" cy="360000"/>
           </a:xfrm>
           <a:prstGeom prst="rect">
             <a:avLst/>
@@ -5852,22 +7426,57 @@
           </a:bodyPr>
           <a:lstStyle/>
           <a:p>
-            <a:pPr>
-              <a:defRPr sz="2000" b="1">
-                <a:solidFill>
-                  <a:srgbClr val="1E293B"/>
-                </a:solidFill>
-              </a:defRPr>
-            </a:pPr>
-            <a:r>
-              <a:t>5-1. 데이터 분석: 전국 고등학교 유형별 분포</a:t>
+            <a:pPr algn="r">
+              <a:defRPr sz="1000">
+                <a:solidFill>
+                  <a:srgbClr val="94A3B8"/>
+                </a:solidFill>
+              </a:defRPr>
+            </a:pPr>
+            <a:r>
+              <a:t>6</a:t>
+            </a:r>
+          </a:p>
+        </p:txBody>
+      </p:sp>
+      <p:sp>
+        <p:nvSpPr>
+          <p:cNvPr id="4" name="TextBox 3"/>
+          <p:cNvSpPr txBox="1"/>
+          <p:nvPr/>
+        </p:nvSpPr>
+        <p:spPr>
+          <a:xfrm>
+            <a:off x="900000" y="288000"/>
+            <a:ext cx="10080000" cy="720000"/>
+          </a:xfrm>
+          <a:prstGeom prst="rect">
+            <a:avLst/>
+          </a:prstGeom>
+          <a:noFill/>
+        </p:spPr>
+        <p:txBody>
+          <a:bodyPr wrap="none">
+            <a:spAutoFit/>
+          </a:bodyPr>
+          <a:lstStyle/>
+          <a:p>
+            <a:pPr>
+              <a:defRPr sz="2200" b="1">
+                <a:solidFill>
+                  <a:srgbClr val="0F172A"/>
+                </a:solidFill>
+              </a:defRPr>
+            </a:pPr>
+            <a:r>
+              <a:t>데이터 분석 ① 전국 고등학교 유형별 분포</a:t>
             </a:r>
           </a:p>
         </p:txBody>
       </p:sp>
       <p:pic>
         <p:nvPicPr>
-          <p:cNvPr id="3" name="Picture 2" descr="01_school_types.png"/>
+          <p:cNvPr id="5" name="Picture 4" descr="01_school_types.png"/>
           <p:cNvPicPr>
             <a:picLocks noChangeAspect="1"/>
           </p:cNvPicPr>
@@ -5881,8 +7490,8 @@
         </p:blipFill>
         <p:spPr>
           <a:xfrm>
-            <a:off x="1080000" y="1080000"/>
-            <a:ext cx="8640000" cy="5040000"/>
+            <a:off x="1440000" y="1080000"/>
+            <a:ext cx="9360000" cy="4860000"/>
           </a:xfrm>
           <a:prstGeom prst="rect">
             <a:avLst/>
@@ -5891,14 +7500,14 @@
       </p:pic>
       <p:sp>
         <p:nvSpPr>
-          <p:cNvPr id="4" name="TextBox 3"/>
+          <p:cNvPr id="6" name="TextBox 5"/>
           <p:cNvSpPr txBox="1"/>
           <p:nvPr/>
         </p:nvSpPr>
         <p:spPr>
           <a:xfrm>
-            <a:off x="720000" y="6480000"/>
-            <a:ext cx="9360000" cy="720000"/>
+            <a:off x="900000" y="6120000"/>
+            <a:ext cx="10440000" cy="540000"/>
           </a:xfrm>
           <a:prstGeom prst="rect">
             <a:avLst/>
@@ -5912,14 +7521,14 @@
           <a:lstStyle/>
           <a:p>
             <a:pPr algn="ctr">
-              <a:defRPr sz="1200">
+              <a:defRPr sz="1100">
                 <a:solidFill>
                   <a:srgbClr val="64748B"/>
                 </a:solidFill>
               </a:defRPr>
             </a:pPr>
             <a:r>
-              <a:t>전국 2,407개 고등학교 | 일반고 68.3%, 특성화고 20.4%, 특목고 6.6%, 자율고 4.7%</a:t>
+              <a:t>일반고 1,645개(68%) · 특성화고 490개(20%) · 특목고 160개(7%) · 자율고 112개(5%) | 나이스 공공데이터 기반</a:t>
             </a:r>
           </a:p>
         </p:txBody>
@@ -5935,6 +7544,14 @@
 <file path=ppt/slides/slide8.xml><?xml version="1.0" encoding="utf-8"?>
 <p:sld xmlns:a="http://schemas.openxmlformats.org/drawingml/2006/main" xmlns:p="http://schemas.openxmlformats.org/presentationml/2006/main" xmlns:r="http://schemas.openxmlformats.org/officeDocument/2006/relationships">
   <p:cSld>
+    <p:bg>
+      <p:bgPr>
+        <a:solidFill>
+          <a:srgbClr val="FFFFFF"/>
+        </a:solidFill>
+        <a:effectLst/>
+      </p:bgPr>
+    </p:bg>
     <p:spTree>
       <p:nvGrpSpPr>
         <p:cNvPr id="1" name=""/>
@@ -5944,14 +7561,57 @@
       <p:grpSpPr/>
       <p:sp>
         <p:nvSpPr>
-          <p:cNvPr id="2" name="TextBox 1"/>
+          <p:cNvPr id="2" name="Rectangle 1"/>
+          <p:cNvSpPr/>
+          <p:nvPr/>
+        </p:nvSpPr>
+        <p:spPr>
+          <a:xfrm>
+            <a:off x="0" y="0"/>
+            <a:ext cx="288000" cy="6858000"/>
+          </a:xfrm>
+          <a:prstGeom prst="rect">
+            <a:avLst/>
+          </a:prstGeom>
+          <a:solidFill>
+            <a:srgbClr val="1D4ED8"/>
+          </a:solidFill>
+          <a:ln>
+            <a:noFill/>
+          </a:ln>
+        </p:spPr>
+        <p:style>
+          <a:lnRef idx="1">
+            <a:schemeClr val="accent1"/>
+          </a:lnRef>
+          <a:fillRef idx="3">
+            <a:schemeClr val="accent1"/>
+          </a:fillRef>
+          <a:effectRef idx="2">
+            <a:schemeClr val="accent1"/>
+          </a:effectRef>
+          <a:fontRef idx="minor">
+            <a:schemeClr val="lt1"/>
+          </a:fontRef>
+        </p:style>
+        <p:txBody>
+          <a:bodyPr rtlCol="0" anchor="ctr"/>
+          <a:lstStyle/>
+          <a:p>
+            <a:pPr algn="ctr"/>
+          </a:p>
+        </p:txBody>
+      </p:sp>
+      <p:sp>
+        <p:nvSpPr>
+          <p:cNvPr id="3" name="TextBox 2"/>
           <p:cNvSpPr txBox="1"/>
           <p:nvPr/>
         </p:nvSpPr>
         <p:spPr>
           <a:xfrm>
-            <a:off x="720000" y="180000"/>
-            <a:ext cx="9360000" cy="720000"/>
+            <a:off x="11160000" y="6300000"/>
+            <a:ext cx="720000" cy="360000"/>
           </a:xfrm>
           <a:prstGeom prst="rect">
             <a:avLst/>
@@ -5964,22 +7624,57 @@
           </a:bodyPr>
           <a:lstStyle/>
           <a:p>
-            <a:pPr>
-              <a:defRPr sz="2000" b="1">
-                <a:solidFill>
-                  <a:srgbClr val="1E293B"/>
-                </a:solidFill>
-              </a:defRPr>
-            </a:pPr>
-            <a:r>
-              <a:t>5-2. 데이터 분석: 시도별 고등학교 수</a:t>
+            <a:pPr algn="r">
+              <a:defRPr sz="1000">
+                <a:solidFill>
+                  <a:srgbClr val="94A3B8"/>
+                </a:solidFill>
+              </a:defRPr>
+            </a:pPr>
+            <a:r>
+              <a:t>7</a:t>
+            </a:r>
+          </a:p>
+        </p:txBody>
+      </p:sp>
+      <p:sp>
+        <p:nvSpPr>
+          <p:cNvPr id="4" name="TextBox 3"/>
+          <p:cNvSpPr txBox="1"/>
+          <p:nvPr/>
+        </p:nvSpPr>
+        <p:spPr>
+          <a:xfrm>
+            <a:off x="900000" y="288000"/>
+            <a:ext cx="10080000" cy="720000"/>
+          </a:xfrm>
+          <a:prstGeom prst="rect">
+            <a:avLst/>
+          </a:prstGeom>
+          <a:noFill/>
+        </p:spPr>
+        <p:txBody>
+          <a:bodyPr wrap="none">
+            <a:spAutoFit/>
+          </a:bodyPr>
+          <a:lstStyle/>
+          <a:p>
+            <a:pPr>
+              <a:defRPr sz="2200" b="1">
+                <a:solidFill>
+                  <a:srgbClr val="0F172A"/>
+                </a:solidFill>
+              </a:defRPr>
+            </a:pPr>
+            <a:r>
+              <a:t>데이터 분석 ② 시도별 고등학교 수</a:t>
             </a:r>
           </a:p>
         </p:txBody>
       </p:sp>
       <p:pic>
         <p:nvPicPr>
-          <p:cNvPr id="3" name="Picture 2" descr="02_schools_by_region.png"/>
+          <p:cNvPr id="5" name="Picture 4" descr="02_schools_by_region.png"/>
           <p:cNvPicPr>
             <a:picLocks noChangeAspect="1"/>
           </p:cNvPicPr>
@@ -5993,8 +7688,8 @@
         </p:blipFill>
         <p:spPr>
           <a:xfrm>
-            <a:off x="1080000" y="1080000"/>
-            <a:ext cx="8640000" cy="5040000"/>
+            <a:off x="1440000" y="1080000"/>
+            <a:ext cx="9360000" cy="4860000"/>
           </a:xfrm>
           <a:prstGeom prst="rect">
             <a:avLst/>
@@ -6003,14 +7698,14 @@
       </p:pic>
       <p:sp>
         <p:nvSpPr>
-          <p:cNvPr id="4" name="TextBox 3"/>
+          <p:cNvPr id="6" name="TextBox 5"/>
           <p:cNvSpPr txBox="1"/>
           <p:nvPr/>
         </p:nvSpPr>
         <p:spPr>
           <a:xfrm>
-            <a:off x="720000" y="6480000"/>
-            <a:ext cx="9360000" cy="720000"/>
+            <a:off x="900000" y="6120000"/>
+            <a:ext cx="10440000" cy="540000"/>
           </a:xfrm>
           <a:prstGeom prst="rect">
             <a:avLst/>
@@ -6024,14 +7719,14 @@
           <a:lstStyle/>
           <a:p>
             <a:pPr algn="ctr">
-              <a:defRPr sz="1200">
+              <a:defRPr sz="1100">
                 <a:solidFill>
                   <a:srgbClr val="64748B"/>
                 </a:solidFill>
               </a:defRPr>
             </a:pPr>
             <a:r>
-              <a:t>경기도(505개) &gt; 서울(319개) &gt; 경남(195개) 순 | 지역별 교육 인프라 격차 확인</a:t>
+              <a:t>경기도(505개) &gt; 서울(319개) &gt; 경남(195개) | 수도권 집중 및 지역 간 인프라 격차 확인</a:t>
             </a:r>
           </a:p>
         </p:txBody>
@@ -6047,6 +7742,14 @@
 <file path=ppt/slides/slide9.xml><?xml version="1.0" encoding="utf-8"?>
 <p:sld xmlns:a="http://schemas.openxmlformats.org/drawingml/2006/main" xmlns:p="http://schemas.openxmlformats.org/presentationml/2006/main" xmlns:r="http://schemas.openxmlformats.org/officeDocument/2006/relationships">
   <p:cSld>
+    <p:bg>
+      <p:bgPr>
+        <a:solidFill>
+          <a:srgbClr val="FFFFFF"/>
+        </a:solidFill>
+        <a:effectLst/>
+      </p:bgPr>
+    </p:bg>
     <p:spTree>
       <p:nvGrpSpPr>
         <p:cNvPr id="1" name=""/>
@@ -6056,14 +7759,57 @@
       <p:grpSpPr/>
       <p:sp>
         <p:nvSpPr>
-          <p:cNvPr id="2" name="TextBox 1"/>
+          <p:cNvPr id="2" name="Rectangle 1"/>
+          <p:cNvSpPr/>
+          <p:nvPr/>
+        </p:nvSpPr>
+        <p:spPr>
+          <a:xfrm>
+            <a:off x="0" y="0"/>
+            <a:ext cx="288000" cy="6858000"/>
+          </a:xfrm>
+          <a:prstGeom prst="rect">
+            <a:avLst/>
+          </a:prstGeom>
+          <a:solidFill>
+            <a:srgbClr val="1D4ED8"/>
+          </a:solidFill>
+          <a:ln>
+            <a:noFill/>
+          </a:ln>
+        </p:spPr>
+        <p:style>
+          <a:lnRef idx="1">
+            <a:schemeClr val="accent1"/>
+          </a:lnRef>
+          <a:fillRef idx="3">
+            <a:schemeClr val="accent1"/>
+          </a:fillRef>
+          <a:effectRef idx="2">
+            <a:schemeClr val="accent1"/>
+          </a:effectRef>
+          <a:fontRef idx="minor">
+            <a:schemeClr val="lt1"/>
+          </a:fontRef>
+        </p:style>
+        <p:txBody>
+          <a:bodyPr rtlCol="0" anchor="ctr"/>
+          <a:lstStyle/>
+          <a:p>
+            <a:pPr algn="ctr"/>
+          </a:p>
+        </p:txBody>
+      </p:sp>
+      <p:sp>
+        <p:nvSpPr>
+          <p:cNvPr id="3" name="TextBox 2"/>
           <p:cNvSpPr txBox="1"/>
           <p:nvPr/>
         </p:nvSpPr>
         <p:spPr>
           <a:xfrm>
-            <a:off x="720000" y="180000"/>
-            <a:ext cx="9360000" cy="720000"/>
+            <a:off x="11160000" y="6300000"/>
+            <a:ext cx="720000" cy="360000"/>
           </a:xfrm>
           <a:prstGeom prst="rect">
             <a:avLst/>
@@ -6076,22 +7822,57 @@
           </a:bodyPr>
           <a:lstStyle/>
           <a:p>
-            <a:pPr>
-              <a:defRPr sz="2000" b="1">
-                <a:solidFill>
-                  <a:srgbClr val="1E293B"/>
-                </a:solidFill>
-              </a:defRPr>
-            </a:pPr>
-            <a:r>
-              <a:t>5-3. 데이터 분석: Holland 유형별 직업 분포</a:t>
+            <a:pPr algn="r">
+              <a:defRPr sz="1000">
+                <a:solidFill>
+                  <a:srgbClr val="94A3B8"/>
+                </a:solidFill>
+              </a:defRPr>
+            </a:pPr>
+            <a:r>
+              <a:t>8</a:t>
+            </a:r>
+          </a:p>
+        </p:txBody>
+      </p:sp>
+      <p:sp>
+        <p:nvSpPr>
+          <p:cNvPr id="4" name="TextBox 3"/>
+          <p:cNvSpPr txBox="1"/>
+          <p:nvPr/>
+        </p:nvSpPr>
+        <p:spPr>
+          <a:xfrm>
+            <a:off x="900000" y="288000"/>
+            <a:ext cx="10080000" cy="720000"/>
+          </a:xfrm>
+          <a:prstGeom prst="rect">
+            <a:avLst/>
+          </a:prstGeom>
+          <a:noFill/>
+        </p:spPr>
+        <p:txBody>
+          <a:bodyPr wrap="none">
+            <a:spAutoFit/>
+          </a:bodyPr>
+          <a:lstStyle/>
+          <a:p>
+            <a:pPr>
+              <a:defRPr sz="2200" b="1">
+                <a:solidFill>
+                  <a:srgbClr val="0F172A"/>
+                </a:solidFill>
+              </a:defRPr>
+            </a:pPr>
+            <a:r>
+              <a:t>데이터 분석 ③ Holland 유형별 직업 분포</a:t>
             </a:r>
           </a:p>
         </p:txBody>
       </p:sp>
       <p:pic>
         <p:nvPicPr>
-          <p:cNvPr id="3" name="Picture 2" descr="04_holland_distribution.png"/>
+          <p:cNvPr id="5" name="Picture 4" descr="04_holland_distribution.png"/>
           <p:cNvPicPr>
             <a:picLocks noChangeAspect="1"/>
           </p:cNvPicPr>
@@ -6105,8 +7886,8 @@
         </p:blipFill>
         <p:spPr>
           <a:xfrm>
-            <a:off x="1080000" y="1080000"/>
-            <a:ext cx="8640000" cy="5040000"/>
+            <a:off x="1440000" y="1080000"/>
+            <a:ext cx="9360000" cy="4860000"/>
           </a:xfrm>
           <a:prstGeom prst="rect">
             <a:avLst/>
@@ -6115,14 +7896,14 @@
       </p:pic>
       <p:sp>
         <p:nvSpPr>
-          <p:cNvPr id="4" name="TextBox 3"/>
+          <p:cNvPr id="6" name="TextBox 5"/>
           <p:cNvSpPr txBox="1"/>
           <p:nvPr/>
         </p:nvSpPr>
         <p:spPr>
           <a:xfrm>
-            <a:off x="720000" y="6480000"/>
-            <a:ext cx="9360000" cy="720000"/>
+            <a:off x="900000" y="6120000"/>
+            <a:ext cx="10440000" cy="540000"/>
           </a:xfrm>
           <a:prstGeom prst="rect">
             <a:avLst/>
@@ -6136,14 +7917,14 @@
           <a:lstStyle/>
           <a:p>
             <a:pPr algn="ctr">
-              <a:defRPr sz="1200">
+              <a:defRPr sz="1100">
                 <a:solidFill>
                   <a:srgbClr val="64748B"/>
                 </a:solidFill>
               </a:defRPr>
             </a:pPr>
             <a:r>
-              <a:t>현실형(R) 37%로 가장 많음 | 워크넷 462개 직업 능력 데이터 기반 산출</a:t>
+              <a:t>현실형(R) 37%로 최다 | 워크넷 462개 직업의 능력/지식 데이터 기반 Holland 코드 산출 결과</a:t>
             </a:r>
           </a:p>
         </p:txBody>
